--- a/docs/output/PJ1测试汇报_成果展示风格版_优化版.pptx
+++ b/docs/output/PJ1测试汇报_成果展示风格版_优化版.pptx
@@ -3387,14 +3387,14 @@
       </p:sp>
       <p:sp>
         <p:nvSpPr>
-          <p:cNvPr id="9" name="TextBox 8"/>
+          <p:cNvPr id="10" name="TextBox 9"/>
           <p:cNvSpPr txBox="1"/>
           <p:nvPr/>
         </p:nvSpPr>
         <p:spPr>
           <a:xfrm>
-            <a:off x="228600" y="6419088"/>
-            <a:ext cx="1280160" cy="164592"/>
+            <a:off x="1211580" y="1497330"/>
+            <a:ext cx="9601200" cy="731520"/>
           </a:xfrm>
           <a:prstGeom prst="rect">
             <a:avLst/>
@@ -3403,20 +3403,37 @@
         </p:spPr>
         <p:txBody>
           <a:bodyPr wrap="none">
-            <a:spAutoFit/>
+            <a:noAutofit/>
           </a:bodyPr>
           <a:lstStyle/>
           <a:p>
+            <a:pPr algn="ctr"/>
             <a:r>
-              <a:rPr sz="700" b="0">
+              <a:rPr lang="en-US" altLang="zh-CN" sz="4400" b="1" kern="100" dirty="0">
+                <a:latin typeface="等线" panose="02010600030101010101" pitchFamily="2" charset="-122"/>
+                <a:ea typeface="宋体" panose="02010600030101010101" pitchFamily="2" charset="-122"/>
+                <a:sym typeface="+mn-ea"/>
+              </a:rPr>
+              <a:t>PJ1</a:t>
+            </a:r>
+            <a:r>
+              <a:rPr lang="zh-CN" altLang="en-US" sz="4400" b="1" kern="100" dirty="0">
+                <a:latin typeface="等线" panose="02010600030101010101" pitchFamily="2" charset="-122"/>
+                <a:ea typeface="宋体" panose="02010600030101010101" pitchFamily="2" charset="-122"/>
+                <a:sym typeface="+mn-ea"/>
+              </a:rPr>
+              <a:t>体育场预约系统</a:t>
+            </a:r>
+            <a:r>
+              <a:rPr sz="4400" b="1">
                 <a:solidFill>
                   <a:srgbClr val="000000"/>
                 </a:solidFill>
                 <a:latin typeface="微软雅黑" panose="020B0503020204020204" charset="-122"/>
               </a:rPr>
-              <a:t>图表1</a:t>
+              <a:t>  测试成果展示</a:t>
             </a:r>
-            <a:endParaRPr sz="700" b="0">
+            <a:endParaRPr sz="4400" b="1">
               <a:solidFill>
                 <a:srgbClr val="000000"/>
               </a:solidFill>
@@ -3427,14 +3444,14 @@
       </p:sp>
       <p:sp>
         <p:nvSpPr>
-          <p:cNvPr id="10" name="TextBox 9"/>
+          <p:cNvPr id="11" name="TextBox 10"/>
           <p:cNvSpPr txBox="1"/>
           <p:nvPr/>
         </p:nvSpPr>
         <p:spPr>
           <a:xfrm>
-            <a:off x="1325880" y="1097280"/>
-            <a:ext cx="9601200" cy="731520"/>
+            <a:off x="1097280" y="3108960"/>
+            <a:ext cx="9966960" cy="822960"/>
           </a:xfrm>
           <a:prstGeom prst="rect">
             <a:avLst/>
@@ -3443,62 +3460,30 @@
         </p:spPr>
         <p:txBody>
           <a:bodyPr wrap="none">
-            <a:normAutofit/>
+            <a:noAutofit/>
           </a:bodyPr>
           <a:lstStyle/>
           <a:p>
             <a:pPr algn="ctr"/>
             <a:r>
-              <a:rPr sz="2900" b="1">
+              <a:rPr sz="2800" b="0">
                 <a:solidFill>
                   <a:srgbClr val="000000"/>
                 </a:solidFill>
                 <a:latin typeface="微软雅黑" panose="020B0503020204020204" charset="-122"/>
               </a:rPr>
-              <a:t>SoftwareTestingDemo  测试成果展示</a:t>
+              <a:t>第  小组   胡彬泽 沙华煜 彭祈元 郭政颖 周宇尘</a:t>
             </a:r>
-            <a:endParaRPr sz="2900" b="1">
+            <a:endParaRPr sz="2800" b="0">
               <a:solidFill>
                 <a:srgbClr val="000000"/>
               </a:solidFill>
               <a:latin typeface="微软雅黑" panose="020B0503020204020204" charset="-122"/>
             </a:endParaRPr>
           </a:p>
-        </p:txBody>
-      </p:sp>
-      <p:sp>
-        <p:nvSpPr>
-          <p:cNvPr id="11" name="TextBox 10"/>
-          <p:cNvSpPr txBox="1"/>
-          <p:nvPr/>
-        </p:nvSpPr>
-        <p:spPr>
-          <a:xfrm>
-            <a:off x="1097280" y="3108960"/>
-            <a:ext cx="9966960" cy="822960"/>
-          </a:xfrm>
-          <a:prstGeom prst="rect">
-            <a:avLst/>
-          </a:prstGeom>
-          <a:noFill/>
-        </p:spPr>
-        <p:txBody>
-          <a:bodyPr wrap="none">
-            <a:normAutofit/>
-          </a:bodyPr>
-          <a:lstStyle/>
           <a:p>
             <a:pPr algn="ctr"/>
-            <a:r>
-              <a:rPr sz="1700" b="0">
-                <a:solidFill>
-                  <a:srgbClr val="000000"/>
-                </a:solidFill>
-                <a:latin typeface="微软雅黑" panose="020B0503020204020204" charset="-122"/>
-              </a:rPr>
-              <a:t>第 PJ1 小组   胡彬泽 沙华煜 彭祈元 郭政颖 周宇尘</a:t>
-            </a:r>
-            <a:endParaRPr sz="1700" b="0">
+            <a:endParaRPr sz="2800" b="0">
               <a:solidFill>
                 <a:srgbClr val="000000"/>
               </a:solidFill>
@@ -3508,7 +3493,7 @@
           <a:p>
             <a:pPr algn="ctr"/>
             <a:r>
-              <a:rPr sz="1700" b="0">
+              <a:rPr sz="2800" b="0">
                 <a:solidFill>
                   <a:srgbClr val="000000"/>
                 </a:solidFill>
@@ -3516,7 +3501,7 @@
               </a:rPr>
               <a:t>测试计划标识   Project1_TestPlan_V1.2_20260423</a:t>
             </a:r>
-            <a:endParaRPr sz="1700" b="0">
+            <a:endParaRPr sz="2800" b="0">
               <a:solidFill>
                 <a:srgbClr val="000000"/>
               </a:solidFill>
@@ -3846,14 +3831,14 @@
       </p:sp>
       <p:sp>
         <p:nvSpPr>
-          <p:cNvPr id="9" name="TextBox 8"/>
+          <p:cNvPr id="10" name="TextBox 9"/>
           <p:cNvSpPr txBox="1"/>
           <p:nvPr/>
         </p:nvSpPr>
         <p:spPr>
           <a:xfrm>
-            <a:off x="228600" y="6419088"/>
-            <a:ext cx="1280160" cy="164592"/>
+            <a:off x="749808" y="320040"/>
+            <a:ext cx="10515600" cy="640080"/>
           </a:xfrm>
           <a:prstGeom prst="rect">
             <a:avLst/>
@@ -3861,66 +3846,16 @@
           <a:noFill/>
         </p:spPr>
         <p:txBody>
-          <a:bodyPr wrap="none">
+          <a:bodyPr wrap="none" anchor="ctr">
             <a:spAutoFit/>
           </a:bodyPr>
           <a:lstStyle/>
           <a:p>
             <a:r>
-              <a:rPr sz="700" b="0">
-                <a:solidFill>
-                  <a:srgbClr val="000000"/>
-                </a:solidFill>
-                <a:latin typeface="微软雅黑" panose="020B0503020204020204" charset="-122"/>
-              </a:rPr>
-              <a:t>图表10</a:t>
+              <a:rPr sz="2800"/>
+              <a:t>本轮未覆盖的测试范围</a:t>
             </a:r>
-            <a:endParaRPr sz="700" b="0">
-              <a:solidFill>
-                <a:srgbClr val="000000"/>
-              </a:solidFill>
-              <a:latin typeface="微软雅黑" panose="020B0503020204020204" charset="-122"/>
-            </a:endParaRPr>
-          </a:p>
-        </p:txBody>
-      </p:sp>
-      <p:sp>
-        <p:nvSpPr>
-          <p:cNvPr id="10" name="TextBox 9"/>
-          <p:cNvSpPr txBox="1"/>
-          <p:nvPr/>
-        </p:nvSpPr>
-        <p:spPr>
-          <a:xfrm>
-            <a:off x="749808" y="320040"/>
-            <a:ext cx="10515600" cy="640080"/>
-          </a:xfrm>
-          <a:prstGeom prst="rect">
-            <a:avLst/>
-          </a:prstGeom>
-          <a:noFill/>
-        </p:spPr>
-        <p:txBody>
-          <a:bodyPr wrap="none">
-            <a:spAutoFit/>
-          </a:bodyPr>
-          <a:lstStyle/>
-          <a:p>
-            <a:r>
-              <a:rPr sz="3000" b="1">
-                <a:solidFill>
-                  <a:srgbClr val="000000"/>
-                </a:solidFill>
-                <a:latin typeface="微软雅黑" panose="020B0503020204020204" charset="-122"/>
-              </a:rPr>
-              <a:t>不会被测试的特性</a:t>
-            </a:r>
-            <a:endParaRPr sz="3000" b="1">
-              <a:solidFill>
-                <a:srgbClr val="000000"/>
-              </a:solidFill>
-              <a:latin typeface="微软雅黑" panose="020B0503020204020204" charset="-122"/>
-            </a:endParaRPr>
+            <a:endParaRPr sz="2800"/>
           </a:p>
         </p:txBody>
       </p:sp>
@@ -3955,7 +3890,7 @@
                     <a:p>
                       <a:pPr algn="ctr"/>
                       <a:r>
-                        <a:rPr sz="1300" b="1">
+                        <a:rPr sz="1700" b="1">
                           <a:solidFill>
                             <a:srgbClr val="FFFFFF"/>
                           </a:solidFill>
@@ -3984,7 +3919,7 @@
                     <a:p>
                       <a:pPr algn="ctr"/>
                       <a:r>
-                        <a:rPr sz="1300" b="1">
+                        <a:rPr sz="1700" b="1">
                           <a:solidFill>
                             <a:srgbClr val="FFFFFF"/>
                           </a:solidFill>
@@ -4013,7 +3948,7 @@
                     <a:p>
                       <a:pPr algn="ctr"/>
                       <a:r>
-                        <a:rPr sz="1300" b="1">
+                        <a:rPr sz="1700" b="1">
                           <a:solidFill>
                             <a:srgbClr val="FFFFFF"/>
                           </a:solidFill>
@@ -4042,22 +3977,11 @@
                     <a:bodyPr/>
                     <a:lstStyle/>
                     <a:p>
-                      <a:pPr algn="ctr"/>
-                      <a:r>
-                        <a:rPr sz="1200" b="0">
-                          <a:solidFill>
-                            <a:srgbClr val="000000"/>
-                          </a:solidFill>
-                          <a:latin typeface="微软雅黑" panose="020B0503020204020204" charset="-122"/>
-                        </a:rPr>
+                      <a:r>
+                        <a:rPr sz="1700"/>
                         <a:t>1</a:t>
                       </a:r>
-                      <a:endParaRPr sz="1200" b="0">
-                        <a:solidFill>
-                          <a:srgbClr val="000000"/>
-                        </a:solidFill>
-                        <a:latin typeface="微软雅黑" panose="020B0503020204020204" charset="-122"/>
-                      </a:endParaRPr>
+                      <a:endParaRPr sz="1700"/>
                     </a:p>
                   </a:txBody>
                   <a:tcPr>
@@ -4071,22 +3995,11 @@
                     <a:bodyPr/>
                     <a:lstStyle/>
                     <a:p>
-                      <a:pPr algn="ctr"/>
-                      <a:r>
-                        <a:rPr sz="1200" b="0">
-                          <a:solidFill>
-                            <a:srgbClr val="000000"/>
-                          </a:solidFill>
-                          <a:latin typeface="微软雅黑" panose="020B0503020204020204" charset="-122"/>
-                        </a:rPr>
+                      <a:r>
+                        <a:rPr sz="1700"/>
                         <a:t>浏览器 UI 自动化</a:t>
                       </a:r>
-                      <a:endParaRPr sz="1200" b="0">
-                        <a:solidFill>
-                          <a:srgbClr val="000000"/>
-                        </a:solidFill>
-                        <a:latin typeface="微软雅黑" panose="020B0503020204020204" charset="-122"/>
-                      </a:endParaRPr>
+                      <a:endParaRPr sz="1700"/>
                     </a:p>
                   </a:txBody>
                   <a:tcPr>
@@ -4100,22 +4013,11 @@
                     <a:bodyPr/>
                     <a:lstStyle/>
                     <a:p>
-                      <a:pPr algn="ctr"/>
-                      <a:r>
-                        <a:rPr sz="1200" b="0">
-                          <a:solidFill>
-                            <a:srgbClr val="000000"/>
-                          </a:solidFill>
-                          <a:latin typeface="微软雅黑" panose="020B0503020204020204" charset="-122"/>
-                        </a:rPr>
-                        <a:t>PJ1 要求聚焦 service 单元测试与 controller 集成测试</a:t>
-                      </a:r>
-                      <a:endParaRPr sz="1200" b="0">
-                        <a:solidFill>
-                          <a:srgbClr val="000000"/>
-                        </a:solidFill>
-                        <a:latin typeface="微软雅黑" panose="020B0503020204020204" charset="-122"/>
-                      </a:endParaRPr>
+                      <a:r>
+                        <a:rPr sz="1700"/>
+                        <a:t>PJ1 聚焦 service 单元测试与 controller 集成测试，不包含 E2E</a:t>
+                      </a:r>
+                      <a:endParaRPr sz="1700"/>
                     </a:p>
                   </a:txBody>
                   <a:tcPr>
@@ -4131,22 +4033,11 @@
                     <a:bodyPr/>
                     <a:lstStyle/>
                     <a:p>
-                      <a:pPr algn="ctr"/>
-                      <a:r>
-                        <a:rPr sz="1200" b="0">
-                          <a:solidFill>
-                            <a:srgbClr val="000000"/>
-                          </a:solidFill>
-                          <a:latin typeface="微软雅黑" panose="020B0503020204020204" charset="-122"/>
-                        </a:rPr>
+                      <a:r>
+                        <a:rPr sz="1700"/>
                         <a:t>2</a:t>
                       </a:r>
-                      <a:endParaRPr sz="1200" b="0">
-                        <a:solidFill>
-                          <a:srgbClr val="000000"/>
-                        </a:solidFill>
-                        <a:latin typeface="微软雅黑" panose="020B0503020204020204" charset="-122"/>
-                      </a:endParaRPr>
+                      <a:endParaRPr sz="1700"/>
                     </a:p>
                   </a:txBody>
                   <a:tcPr>
@@ -4160,22 +4051,11 @@
                     <a:bodyPr/>
                     <a:lstStyle/>
                     <a:p>
-                      <a:pPr algn="ctr"/>
-                      <a:r>
-                        <a:rPr sz="1200" b="0">
-                          <a:solidFill>
-                            <a:srgbClr val="000000"/>
-                          </a:solidFill>
-                          <a:latin typeface="微软雅黑" panose="020B0503020204020204" charset="-122"/>
-                        </a:rPr>
+                      <a:r>
+                        <a:rPr sz="1700"/>
                         <a:t>性能压测</a:t>
                       </a:r>
-                      <a:endParaRPr sz="1200" b="0">
-                        <a:solidFill>
-                          <a:srgbClr val="000000"/>
-                        </a:solidFill>
-                        <a:latin typeface="微软雅黑" panose="020B0503020204020204" charset="-122"/>
-                      </a:endParaRPr>
+                      <a:endParaRPr sz="1700"/>
                     </a:p>
                   </a:txBody>
                   <a:tcPr>
@@ -4189,22 +4069,11 @@
                     <a:bodyPr/>
                     <a:lstStyle/>
                     <a:p>
-                      <a:pPr algn="ctr"/>
-                      <a:r>
-                        <a:rPr sz="1200" b="0">
-                          <a:solidFill>
-                            <a:srgbClr val="000000"/>
-                          </a:solidFill>
-                          <a:latin typeface="微软雅黑" panose="020B0503020204020204" charset="-122"/>
-                        </a:rPr>
+                      <a:r>
+                        <a:rPr sz="1700"/>
                         <a:t>课程任务未要求吞吐、并发与响应时间指标</a:t>
                       </a:r>
-                      <a:endParaRPr sz="1200" b="0">
-                        <a:solidFill>
-                          <a:srgbClr val="000000"/>
-                        </a:solidFill>
-                        <a:latin typeface="微软雅黑" panose="020B0503020204020204" charset="-122"/>
-                      </a:endParaRPr>
+                      <a:endParaRPr sz="1700"/>
                     </a:p>
                   </a:txBody>
                   <a:tcPr>
@@ -4220,22 +4089,11 @@
                     <a:bodyPr/>
                     <a:lstStyle/>
                     <a:p>
-                      <a:pPr algn="ctr"/>
-                      <a:r>
-                        <a:rPr sz="1200" b="0">
-                          <a:solidFill>
-                            <a:srgbClr val="000000"/>
-                          </a:solidFill>
-                          <a:latin typeface="微软雅黑" panose="020B0503020204020204" charset="-122"/>
-                        </a:rPr>
+                      <a:r>
+                        <a:rPr sz="1700"/>
                         <a:t>3</a:t>
                       </a:r>
-                      <a:endParaRPr sz="1200" b="0">
-                        <a:solidFill>
-                          <a:srgbClr val="000000"/>
-                        </a:solidFill>
-                        <a:latin typeface="微软雅黑" panose="020B0503020204020204" charset="-122"/>
-                      </a:endParaRPr>
+                      <a:endParaRPr sz="1700"/>
                     </a:p>
                   </a:txBody>
                   <a:tcPr>
@@ -4249,22 +4107,11 @@
                     <a:bodyPr/>
                     <a:lstStyle/>
                     <a:p>
-                      <a:pPr algn="ctr"/>
-                      <a:r>
-                        <a:rPr sz="1200" b="0">
-                          <a:solidFill>
-                            <a:srgbClr val="000000"/>
-                          </a:solidFill>
-                          <a:latin typeface="微软雅黑" panose="020B0503020204020204" charset="-122"/>
-                        </a:rPr>
+                      <a:r>
+                        <a:rPr sz="1700"/>
                         <a:t>安全渗透测试</a:t>
                       </a:r>
-                      <a:endParaRPr sz="1200" b="0">
-                        <a:solidFill>
-                          <a:srgbClr val="000000"/>
-                        </a:solidFill>
-                        <a:latin typeface="微软雅黑" panose="020B0503020204020204" charset="-122"/>
-                      </a:endParaRPr>
+                      <a:endParaRPr sz="1700"/>
                     </a:p>
                   </a:txBody>
                   <a:tcPr>
@@ -4278,22 +4125,11 @@
                     <a:bodyPr/>
                     <a:lstStyle/>
                     <a:p>
-                      <a:pPr algn="ctr"/>
-                      <a:r>
-                        <a:rPr sz="1200" b="0">
-                          <a:solidFill>
-                            <a:srgbClr val="000000"/>
-                          </a:solidFill>
-                          <a:latin typeface="微软雅黑" panose="020B0503020204020204" charset="-122"/>
-                        </a:rPr>
-                        <a:t>仅验证登录态与权限分支，不做漏洞扫描</a:t>
-                      </a:r>
-                      <a:endParaRPr sz="1200" b="0">
-                        <a:solidFill>
-                          <a:srgbClr val="000000"/>
-                        </a:solidFill>
-                        <a:latin typeface="微软雅黑" panose="020B0503020204020204" charset="-122"/>
-                      </a:endParaRPr>
+                      <a:r>
+                        <a:rPr sz="1700"/>
+                        <a:t>本轮只做功能测试与探索性缺陷记录，不做漏洞扫描</a:t>
+                      </a:r>
+                      <a:endParaRPr sz="1700"/>
                     </a:p>
                   </a:txBody>
                   <a:tcPr>
@@ -4309,22 +4145,11 @@
                     <a:bodyPr/>
                     <a:lstStyle/>
                     <a:p>
-                      <a:pPr algn="ctr"/>
-                      <a:r>
-                        <a:rPr sz="1200" b="0">
-                          <a:solidFill>
-                            <a:srgbClr val="000000"/>
-                          </a:solidFill>
-                          <a:latin typeface="微软雅黑" panose="020B0503020204020204" charset="-122"/>
-                        </a:rPr>
+                      <a:r>
+                        <a:rPr sz="1700"/>
                         <a:t>4</a:t>
                       </a:r>
-                      <a:endParaRPr sz="1200" b="0">
-                        <a:solidFill>
-                          <a:srgbClr val="000000"/>
-                        </a:solidFill>
-                        <a:latin typeface="微软雅黑" panose="020B0503020204020204" charset="-122"/>
-                      </a:endParaRPr>
+                      <a:endParaRPr sz="1700"/>
                     </a:p>
                   </a:txBody>
                   <a:tcPr>
@@ -4338,22 +4163,11 @@
                     <a:bodyPr/>
                     <a:lstStyle/>
                     <a:p>
-                      <a:pPr algn="ctr"/>
-                      <a:r>
-                        <a:rPr sz="1200" b="0">
-                          <a:solidFill>
-                            <a:srgbClr val="000000"/>
-                          </a:solidFill>
-                          <a:latin typeface="微软雅黑" panose="020B0503020204020204" charset="-122"/>
-                        </a:rPr>
+                      <a:r>
+                        <a:rPr sz="1700"/>
                         <a:t>真实 MySQL 专有行为</a:t>
                       </a:r>
-                      <a:endParaRPr sz="1200" b="0">
-                        <a:solidFill>
-                          <a:srgbClr val="000000"/>
-                        </a:solidFill>
-                        <a:latin typeface="微软雅黑" panose="020B0503020204020204" charset="-122"/>
-                      </a:endParaRPr>
+                      <a:endParaRPr sz="1700"/>
                     </a:p>
                   </a:txBody>
                   <a:tcPr>
@@ -4367,116 +4181,16 @@
                     <a:bodyPr/>
                     <a:lstStyle/>
                     <a:p>
-                      <a:pPr algn="ctr"/>
-                      <a:r>
-                        <a:rPr sz="1200" b="0">
-                          <a:solidFill>
-                            <a:srgbClr val="000000"/>
-                          </a:solidFill>
-                          <a:latin typeface="微软雅黑" panose="020B0503020204020204" charset="-122"/>
-                        </a:rPr>
-                        <a:t>H2 MySQL 模式用于可复现测试，真实库差异列为限制</a:t>
-                      </a:r>
-                      <a:endParaRPr sz="1200" b="0">
-                        <a:solidFill>
-                          <a:srgbClr val="000000"/>
-                        </a:solidFill>
-                        <a:latin typeface="微软雅黑" panose="020B0503020204020204" charset="-122"/>
-                      </a:endParaRPr>
+                      <a:r>
+                        <a:rPr sz="1700"/>
+                        <a:t>测试环境用 H2 MySQL 模式保证可复现，真实库差异列为限制</a:t>
+                      </a:r>
+                      <a:endParaRPr sz="1700"/>
                     </a:p>
                   </a:txBody>
                   <a:tcPr>
                     <a:solidFill>
                       <a:srgbClr val="F1F7EC"/>
-                    </a:solidFill>
-                  </a:tcPr>
-                </a:tc>
-              </a:tr>
-              <a:tr h="594360">
-                <a:tc>
-                  <a:txBody>
-                    <a:bodyPr/>
-                    <a:lstStyle/>
-                    <a:p>
-                      <a:pPr algn="ctr"/>
-                      <a:r>
-                        <a:rPr sz="1200" b="0">
-                          <a:solidFill>
-                            <a:srgbClr val="000000"/>
-                          </a:solidFill>
-                          <a:latin typeface="微软雅黑" panose="020B0503020204020204" charset="-122"/>
-                        </a:rPr>
-                        <a:t>5</a:t>
-                      </a:r>
-                      <a:endParaRPr sz="1200" b="0">
-                        <a:solidFill>
-                          <a:srgbClr val="000000"/>
-                        </a:solidFill>
-                        <a:latin typeface="微软雅黑" panose="020B0503020204020204" charset="-122"/>
-                      </a:endParaRPr>
-                    </a:p>
-                  </a:txBody>
-                  <a:tcPr>
-                    <a:solidFill>
-                      <a:srgbClr val="E2F0D2"/>
-                    </a:solidFill>
-                  </a:tcPr>
-                </a:tc>
-                <a:tc>
-                  <a:txBody>
-                    <a:bodyPr/>
-                    <a:lstStyle/>
-                    <a:p>
-                      <a:pPr algn="ctr"/>
-                      <a:r>
-                        <a:rPr sz="1200" b="0">
-                          <a:solidFill>
-                            <a:srgbClr val="000000"/>
-                          </a:solidFill>
-                          <a:latin typeface="微软雅黑" panose="020B0503020204020204" charset="-122"/>
-                        </a:rPr>
-                        <a:t>真实文件落盘</a:t>
-                      </a:r>
-                      <a:endParaRPr sz="1200" b="0">
-                        <a:solidFill>
-                          <a:srgbClr val="000000"/>
-                        </a:solidFill>
-                        <a:latin typeface="微软雅黑" panose="020B0503020204020204" charset="-122"/>
-                      </a:endParaRPr>
-                    </a:p>
-                  </a:txBody>
-                  <a:tcPr>
-                    <a:solidFill>
-                      <a:srgbClr val="E2F0D2"/>
-                    </a:solidFill>
-                  </a:tcPr>
-                </a:tc>
-                <a:tc>
-                  <a:txBody>
-                    <a:bodyPr/>
-                    <a:lstStyle/>
-                    <a:p>
-                      <a:pPr algn="ctr"/>
-                      <a:r>
-                        <a:rPr sz="1200" b="0">
-                          <a:solidFill>
-                            <a:srgbClr val="000000"/>
-                          </a:solidFill>
-                          <a:latin typeface="微软雅黑" panose="020B0503020204020204" charset="-122"/>
-                        </a:rPr>
-                        <a:t>FileUtil 与业务主流程关联较弱，后续可单独隔离补测</a:t>
-                      </a:r>
-                      <a:endParaRPr sz="1200" b="0">
-                        <a:solidFill>
-                          <a:srgbClr val="000000"/>
-                        </a:solidFill>
-                        <a:latin typeface="微软雅黑" panose="020B0503020204020204" charset="-122"/>
-                      </a:endParaRPr>
-                    </a:p>
-                  </a:txBody>
-                  <a:tcPr>
-                    <a:solidFill>
-                      <a:srgbClr val="E2F0D2"/>
                     </a:solidFill>
                   </a:tcPr>
                 </a:tc>
@@ -4801,46 +4515,6 @@
           <a:lstStyle/>
           <a:p>
             <a:pPr algn="ctr"/>
-          </a:p>
-        </p:txBody>
-      </p:sp>
-      <p:sp>
-        <p:nvSpPr>
-          <p:cNvPr id="9" name="TextBox 8"/>
-          <p:cNvSpPr txBox="1"/>
-          <p:nvPr/>
-        </p:nvSpPr>
-        <p:spPr>
-          <a:xfrm>
-            <a:off x="228600" y="6419088"/>
-            <a:ext cx="1280160" cy="164592"/>
-          </a:xfrm>
-          <a:prstGeom prst="rect">
-            <a:avLst/>
-          </a:prstGeom>
-          <a:noFill/>
-        </p:spPr>
-        <p:txBody>
-          <a:bodyPr wrap="none">
-            <a:spAutoFit/>
-          </a:bodyPr>
-          <a:lstStyle/>
-          <a:p>
-            <a:r>
-              <a:rPr sz="700" b="0">
-                <a:solidFill>
-                  <a:srgbClr val="000000"/>
-                </a:solidFill>
-                <a:latin typeface="微软雅黑" panose="020B0503020204020204" charset="-122"/>
-              </a:rPr>
-              <a:t>图表11</a:t>
-            </a:r>
-            <a:endParaRPr sz="700" b="0">
-              <a:solidFill>
-                <a:srgbClr val="000000"/>
-              </a:solidFill>
-              <a:latin typeface="微软雅黑" panose="020B0503020204020204" charset="-122"/>
-            </a:endParaRPr>
           </a:p>
         </p:txBody>
       </p:sp>
@@ -5840,46 +5514,6 @@
       </p:sp>
       <p:sp>
         <p:nvSpPr>
-          <p:cNvPr id="9" name="TextBox 8"/>
-          <p:cNvSpPr txBox="1"/>
-          <p:nvPr/>
-        </p:nvSpPr>
-        <p:spPr>
-          <a:xfrm>
-            <a:off x="228600" y="6419088"/>
-            <a:ext cx="1280160" cy="164592"/>
-          </a:xfrm>
-          <a:prstGeom prst="rect">
-            <a:avLst/>
-          </a:prstGeom>
-          <a:noFill/>
-        </p:spPr>
-        <p:txBody>
-          <a:bodyPr wrap="none">
-            <a:spAutoFit/>
-          </a:bodyPr>
-          <a:lstStyle/>
-          <a:p>
-            <a:r>
-              <a:rPr sz="700" b="0">
-                <a:solidFill>
-                  <a:srgbClr val="000000"/>
-                </a:solidFill>
-                <a:latin typeface="微软雅黑" panose="020B0503020204020204" charset="-122"/>
-              </a:rPr>
-              <a:t>图表12</a:t>
-            </a:r>
-            <a:endParaRPr sz="700" b="0">
-              <a:solidFill>
-                <a:srgbClr val="000000"/>
-              </a:solidFill>
-              <a:latin typeface="微软雅黑" panose="020B0503020204020204" charset="-122"/>
-            </a:endParaRPr>
-          </a:p>
-        </p:txBody>
-      </p:sp>
-      <p:sp>
-        <p:nvSpPr>
           <p:cNvPr id="10" name="TextBox 9"/>
           <p:cNvSpPr txBox="1"/>
           <p:nvPr/>
@@ -5959,40 +5593,18 @@
           <a:bodyPr rtlCol="0" anchor="ctr"/>
           <a:lstStyle/>
           <a:p>
-            <a:pPr algn="ctr"/>
             <a:r>
-              <a:rPr sz="1500" b="1">
-                <a:solidFill>
-                  <a:srgbClr val="FFFFFF"/>
-                </a:solidFill>
-                <a:latin typeface="微软雅黑" panose="020B0503020204020204" charset="-122"/>
-              </a:rPr>
-              <a:t>128</a:t>
+              <a:rPr sz="2800" b="1"/>
+              <a:t>147</a:t>
             </a:r>
-            <a:endParaRPr sz="1500" b="1">
-              <a:solidFill>
-                <a:srgbClr val="FFFFFF"/>
-              </a:solidFill>
-              <a:latin typeface="微软雅黑" panose="020B0503020204020204" charset="-122"/>
-            </a:endParaRPr>
-          </a:p>
-          <a:p>
-            <a:pPr algn="ctr"/>
+            <a:endParaRPr sz="2800" b="1"/>
+          </a:p>
+          <a:p>
             <a:r>
-              <a:rPr sz="1500" b="1">
-                <a:solidFill>
-                  <a:srgbClr val="FFFFFF"/>
-                </a:solidFill>
-                <a:latin typeface="微软雅黑" panose="020B0503020204020204" charset="-122"/>
-              </a:rPr>
-              <a:t>自动化测试全部通过</a:t>
+              <a:rPr sz="1300" b="0"/>
+              <a:t>真实测试用例全部通过</a:t>
             </a:r>
-            <a:endParaRPr sz="1500" b="1">
-              <a:solidFill>
-                <a:srgbClr val="FFFFFF"/>
-              </a:solidFill>
-              <a:latin typeface="微软雅黑" panose="020B0503020204020204" charset="-122"/>
-            </a:endParaRPr>
+            <a:endParaRPr sz="1300" b="0"/>
           </a:p>
         </p:txBody>
       </p:sp>
@@ -6037,40 +5649,18 @@
           <a:bodyPr rtlCol="0" anchor="ctr"/>
           <a:lstStyle/>
           <a:p>
-            <a:pPr algn="ctr"/>
             <a:r>
-              <a:rPr sz="1500" b="1">
-                <a:solidFill>
-                  <a:srgbClr val="FFFFFF"/>
-                </a:solidFill>
-                <a:latin typeface="微软雅黑" panose="020B0503020204020204" charset="-122"/>
-              </a:rPr>
-              <a:t>92.54%</a:t>
+              <a:rPr sz="2800" b="1"/>
+              <a:t>100%</a:t>
             </a:r>
-            <a:endParaRPr sz="1500" b="1">
-              <a:solidFill>
-                <a:srgbClr val="FFFFFF"/>
-              </a:solidFill>
-              <a:latin typeface="微软雅黑" panose="020B0503020204020204" charset="-122"/>
-            </a:endParaRPr>
-          </a:p>
-          <a:p>
-            <a:pPr algn="ctr"/>
+            <a:endParaRPr sz="2800" b="1"/>
+          </a:p>
+          <a:p>
             <a:r>
-              <a:rPr sz="1500" b="1">
-                <a:solidFill>
-                  <a:srgbClr val="FFFFFF"/>
-                </a:solidFill>
-                <a:latin typeface="微软雅黑" panose="020B0503020204020204" charset="-122"/>
-              </a:rPr>
+              <a:rPr sz="1300" b="0"/>
               <a:t>整体指令覆盖率</a:t>
             </a:r>
-            <a:endParaRPr sz="1500" b="1">
-              <a:solidFill>
-                <a:srgbClr val="FFFFFF"/>
-              </a:solidFill>
-              <a:latin typeface="微软雅黑" panose="020B0503020204020204" charset="-122"/>
-            </a:endParaRPr>
+            <a:endParaRPr sz="1300" b="0"/>
           </a:p>
         </p:txBody>
       </p:sp>
@@ -6115,61 +5705,43 @@
           <a:bodyPr rtlCol="0" anchor="ctr"/>
           <a:lstStyle/>
           <a:p>
-            <a:pPr algn="ctr"/>
             <a:r>
-              <a:rPr sz="1500" b="1">
-                <a:solidFill>
-                  <a:srgbClr val="FFFFFF"/>
-                </a:solidFill>
-                <a:latin typeface="微软雅黑" panose="020B0503020204020204" charset="-122"/>
-              </a:rPr>
-              <a:t>80.77%</a:t>
+              <a:rPr sz="2800" b="1"/>
+              <a:t>100%</a:t>
             </a:r>
-            <a:endParaRPr sz="1500" b="1">
-              <a:solidFill>
-                <a:srgbClr val="FFFFFF"/>
-              </a:solidFill>
-              <a:latin typeface="微软雅黑" panose="020B0503020204020204" charset="-122"/>
-            </a:endParaRPr>
-          </a:p>
-          <a:p>
-            <a:pPr algn="ctr"/>
+            <a:endParaRPr sz="2800" b="1"/>
+          </a:p>
+          <a:p>
             <a:r>
-              <a:rPr sz="1500" b="1">
-                <a:solidFill>
-                  <a:srgbClr val="FFFFFF"/>
-                </a:solidFill>
-                <a:latin typeface="微软雅黑" panose="020B0503020204020204" charset="-122"/>
-              </a:rPr>
+              <a:rPr sz="1300" b="0"/>
               <a:t>整体分支覆盖率</a:t>
             </a:r>
-            <a:endParaRPr sz="1500" b="1">
-              <a:solidFill>
-                <a:srgbClr val="FFFFFF"/>
-              </a:solidFill>
-              <a:latin typeface="微软雅黑" panose="020B0503020204020204" charset="-122"/>
-            </a:endParaRPr>
+            <a:endParaRPr sz="1300" b="0"/>
           </a:p>
         </p:txBody>
       </p:sp>
       <p:pic>
         <p:nvPicPr>
-          <p:cNvPr id="14" name="Picture 13" descr="coverage_summary_showcase.png"/>
+          <p:cNvPr id="17" name="图片 16"/>
           <p:cNvPicPr>
             <a:picLocks noChangeAspect="1"/>
           </p:cNvPicPr>
-          <p:nvPr/>
+          <p:nvPr>
+            <p:custDataLst>
+              <p:tags r:id="rId1"/>
+            </p:custDataLst>
+          </p:nvPr>
         </p:nvPicPr>
         <p:blipFill>
-          <a:blip r:embed="rId1"/>
+          <a:blip r:embed="rId2"/>
           <a:stretch>
             <a:fillRect/>
           </a:stretch>
         </p:blipFill>
         <p:spPr>
           <a:xfrm>
-            <a:off x="3200400" y="1143000"/>
-            <a:ext cx="7863840" cy="3886200"/>
+            <a:off x="3997325" y="648335"/>
+            <a:ext cx="4631690" cy="4528820"/>
           </a:xfrm>
           <a:prstGeom prst="rect">
             <a:avLst/>
@@ -6178,14 +5750,14 @@
       </p:pic>
       <p:sp>
         <p:nvSpPr>
-          <p:cNvPr id="15" name="TextBox 14"/>
+          <p:cNvPr id="18" name="TextBox 17"/>
           <p:cNvSpPr txBox="1"/>
           <p:nvPr/>
         </p:nvSpPr>
         <p:spPr>
           <a:xfrm>
-            <a:off x="3383280" y="5212080"/>
-            <a:ext cx="7498079" cy="411480"/>
+            <a:off x="2971800" y="5257800"/>
+            <a:ext cx="7223760" cy="384048"/>
           </a:xfrm>
           <a:prstGeom prst="rect">
             <a:avLst/>
@@ -6193,26 +5765,16 @@
           <a:noFill/>
         </p:spPr>
         <p:txBody>
-          <a:bodyPr wrap="none">
-            <a:normAutofit/>
+          <a:bodyPr wrap="none" anchor="ctr">
+            <a:spAutoFit/>
           </a:bodyPr>
           <a:lstStyle/>
           <a:p>
             <a:r>
-              <a:rPr sz="1300" b="0">
-                <a:solidFill>
-                  <a:srgbClr val="696969"/>
-                </a:solidFill>
-                <a:latin typeface="微软雅黑" panose="020B0503020204020204" charset="-122"/>
-              </a:rPr>
-              <a:t>补充：service.impl 指令/分支覆盖率 100%；controller 指令覆盖率 98.54%，分支覆盖率 82.35%。</a:t>
+              <a:rPr sz="1500"/>
+              <a:t>正式回归：147 条全通过；探索性失败用例：6 条，用于记录缺陷，不纳入默认统计。</a:t>
             </a:r>
-            <a:endParaRPr sz="1300" b="0">
-              <a:solidFill>
-                <a:srgbClr val="696969"/>
-              </a:solidFill>
-              <a:latin typeface="微软雅黑" panose="020B0503020204020204" charset="-122"/>
-            </a:endParaRPr>
+            <a:endParaRPr sz="1500"/>
           </a:p>
         </p:txBody>
       </p:sp>
@@ -6537,53 +6099,13 @@
       </p:sp>
       <p:sp>
         <p:nvSpPr>
-          <p:cNvPr id="9" name="TextBox 8"/>
-          <p:cNvSpPr txBox="1"/>
-          <p:nvPr/>
-        </p:nvSpPr>
-        <p:spPr>
-          <a:xfrm>
-            <a:off x="228600" y="6419088"/>
-            <a:ext cx="1280160" cy="164592"/>
-          </a:xfrm>
-          <a:prstGeom prst="rect">
-            <a:avLst/>
-          </a:prstGeom>
-          <a:noFill/>
-        </p:spPr>
-        <p:txBody>
-          <a:bodyPr wrap="none">
-            <a:spAutoFit/>
-          </a:bodyPr>
-          <a:lstStyle/>
-          <a:p>
-            <a:r>
-              <a:rPr sz="700" b="0">
-                <a:solidFill>
-                  <a:srgbClr val="000000"/>
-                </a:solidFill>
-                <a:latin typeface="微软雅黑" panose="020B0503020204020204" charset="-122"/>
-              </a:rPr>
-              <a:t>图表13</a:t>
-            </a:r>
-            <a:endParaRPr sz="700" b="0">
-              <a:solidFill>
-                <a:srgbClr val="000000"/>
-              </a:solidFill>
-              <a:latin typeface="微软雅黑" panose="020B0503020204020204" charset="-122"/>
-            </a:endParaRPr>
-          </a:p>
-        </p:txBody>
-      </p:sp>
-      <p:sp>
-        <p:nvSpPr>
           <p:cNvPr id="10" name="TextBox 9"/>
           <p:cNvSpPr txBox="1"/>
           <p:nvPr/>
         </p:nvSpPr>
         <p:spPr>
           <a:xfrm>
-            <a:off x="749808" y="320040"/>
+            <a:off x="749808" y="929640"/>
             <a:ext cx="10515600" cy="640080"/>
           </a:xfrm>
           <a:prstGeom prst="rect">
@@ -6623,8 +6145,8 @@
         </p:nvSpPr>
         <p:spPr>
           <a:xfrm>
-            <a:off x="640080" y="1234440"/>
-            <a:ext cx="10881360" cy="4389120"/>
+            <a:off x="600710" y="2003425"/>
+            <a:ext cx="10881360" cy="2686050"/>
           </a:xfrm>
           <a:prstGeom prst="rect">
             <a:avLst/>
@@ -6632,94 +6154,44 @@
           <a:noFill/>
         </p:spPr>
         <p:txBody>
-          <a:bodyPr wrap="none">
+          <a:bodyPr wrap="none" anchor="ctr">
             <a:normAutofit/>
           </a:bodyPr>
           <a:lstStyle/>
           <a:p>
             <a:r>
-              <a:rPr sz="1500" b="0">
-                <a:solidFill>
-                  <a:srgbClr val="000000"/>
-                </a:solidFill>
-                <a:latin typeface="微软雅黑" panose="020B0503020204020204" charset="-122"/>
-              </a:rPr>
-              <a:t>• service 单测：@ExtendWith + MockitoExtension 隔离 DAO</a:t>
+              <a:rPr sz="1800"/>
+              <a:t>• service 单测：@ExtendWith + MockitoExtension 隔离 DAO，验证业务方法返回与状态变化</a:t>
             </a:r>
-            <a:endParaRPr sz="1500" b="0">
-              <a:solidFill>
-                <a:srgbClr val="000000"/>
-              </a:solidFill>
-              <a:latin typeface="微软雅黑" panose="020B0503020204020204" charset="-122"/>
-            </a:endParaRPr>
+            <a:endParaRPr sz="1800"/>
           </a:p>
           <a:p>
             <a:r>
-              <a:rPr sz="1500" b="0">
-                <a:solidFill>
-                  <a:srgbClr val="000000"/>
-                </a:solidFill>
-                <a:latin typeface="微软雅黑" panose="020B0503020204020204" charset="-122"/>
-              </a:rPr>
-              <a:t>• controller 集成：@SpringBootTest + @AutoConfigureMockMvc 启动上下文</a:t>
+              <a:rPr sz="1800"/>
+              <a:t>• controller 集成：@SpringBootTest + @AutoConfigureMockMvc + H2，验证接口到数据库链路</a:t>
             </a:r>
-            <a:endParaRPr sz="1500" b="0">
-              <a:solidFill>
-                <a:srgbClr val="000000"/>
-              </a:solidFill>
-              <a:latin typeface="微软雅黑" panose="020B0503020204020204" charset="-122"/>
-            </a:endParaRPr>
+            <a:endParaRPr sz="1800"/>
           </a:p>
           <a:p>
             <a:r>
-              <a:rPr sz="1500" b="0">
-                <a:solidFill>
-                  <a:srgbClr val="000000"/>
-                </a:solidFill>
-                <a:latin typeface="微软雅黑" panose="020B0503020204020204" charset="-122"/>
-              </a:rPr>
-              <a:t>• BeforeEach / TestDataFactory 统一造数，保证测试互不污染</a:t>
+              <a:rPr sz="1800"/>
+              <a:t>• TestDataFactory / BeforeEach 统一造数，每个用例独立、可重复执行</a:t>
             </a:r>
-            <a:endParaRPr sz="1500" b="0">
-              <a:solidFill>
-                <a:srgbClr val="000000"/>
-              </a:solidFill>
-              <a:latin typeface="微软雅黑" panose="020B0503020204020204" charset="-122"/>
-            </a:endParaRPr>
+            <a:endParaRPr sz="1800"/>
           </a:p>
           <a:p>
             <a:r>
-              <a:rPr sz="1500" b="0">
-                <a:solidFill>
-                  <a:srgbClr val="000000"/>
-                </a:solidFill>
-                <a:latin typeface="微软雅黑" panose="020B0503020204020204" charset="-122"/>
-              </a:rPr>
-              <a:t>• MockMvc perform 后校验 status、view、redirect、model 属性</a:t>
+              <a:rPr sz="1800"/>
+              <a:t>• MockMvc 校验 status、content、view、redirect、session 与数据库结果</a:t>
             </a:r>
-            <a:endParaRPr sz="1500" b="0">
-              <a:solidFill>
-                <a:srgbClr val="000000"/>
-              </a:solidFill>
-              <a:latin typeface="微软雅黑" panose="020B0503020204020204" charset="-122"/>
-            </a:endParaRPr>
+            <a:endParaRPr sz="1800"/>
           </a:p>
           <a:p>
             <a:r>
-              <a:rPr sz="1500" b="0">
-                <a:solidFill>
-                  <a:srgbClr val="000000"/>
-                </a:solidFill>
-                <a:latin typeface="微软雅黑" panose="020B0503020204020204" charset="-122"/>
-              </a:rPr>
-              <a:t>• 执行 mvn test 后由 Surefire 与 JaCoCo 汇总结果</a:t>
+              <a:rPr sz="1800"/>
+              <a:t>• mvn test 输出 Surefire 报告，JaCoCo 汇总覆盖率到 target/site/jacoco</a:t>
             </a:r>
-            <a:endParaRPr sz="1500" b="0">
-              <a:solidFill>
-                <a:srgbClr val="000000"/>
-              </a:solidFill>
-              <a:latin typeface="微软雅黑" panose="020B0503020204020204" charset="-122"/>
-            </a:endParaRPr>
+            <a:endParaRPr sz="1800"/>
           </a:p>
         </p:txBody>
       </p:sp>
@@ -7044,46 +6516,6 @@
       </p:sp>
       <p:sp>
         <p:nvSpPr>
-          <p:cNvPr id="9" name="TextBox 8"/>
-          <p:cNvSpPr txBox="1"/>
-          <p:nvPr/>
-        </p:nvSpPr>
-        <p:spPr>
-          <a:xfrm>
-            <a:off x="228600" y="6419088"/>
-            <a:ext cx="1280160" cy="164592"/>
-          </a:xfrm>
-          <a:prstGeom prst="rect">
-            <a:avLst/>
-          </a:prstGeom>
-          <a:noFill/>
-        </p:spPr>
-        <p:txBody>
-          <a:bodyPr wrap="none">
-            <a:spAutoFit/>
-          </a:bodyPr>
-          <a:lstStyle/>
-          <a:p>
-            <a:r>
-              <a:rPr sz="700" b="0">
-                <a:solidFill>
-                  <a:srgbClr val="000000"/>
-                </a:solidFill>
-                <a:latin typeface="微软雅黑" panose="020B0503020204020204" charset="-122"/>
-              </a:rPr>
-              <a:t>图表14</a:t>
-            </a:r>
-            <a:endParaRPr sz="700" b="0">
-              <a:solidFill>
-                <a:srgbClr val="000000"/>
-              </a:solidFill>
-              <a:latin typeface="微软雅黑" panose="020B0503020204020204" charset="-122"/>
-            </a:endParaRPr>
-          </a:p>
-        </p:txBody>
-      </p:sp>
-      <p:sp>
-        <p:nvSpPr>
           <p:cNvPr id="10" name="TextBox 9"/>
           <p:cNvSpPr txBox="1"/>
           <p:nvPr/>
@@ -7137,7 +6569,7 @@
             <a:avLst/>
           </a:prstGeom>
           <a:solidFill>
-            <a:srgbClr val="F7F9FC"/>
+            <a:srgbClr val="F5F5F5"/>
           </a:solidFill>
           <a:ln w="6350">
             <a:solidFill>
@@ -7163,146 +6595,123 @@
           <a:bodyPr rtlCol="0" anchor="ctr"/>
           <a:lstStyle/>
           <a:p>
-            <a:pPr algn="l"/>
             <a:r>
               <a:rPr sz="1000">
-                <a:solidFill>
-                  <a:srgbClr val="283C50"/>
-                </a:solidFill>
                 <a:latin typeface="Consolas" panose="020B0609020204030204"/>
               </a:rPr>
               <a:t>@Test</a:t>
             </a:r>
             <a:endParaRPr sz="1000">
-              <a:solidFill>
-                <a:srgbClr val="283C50"/>
-              </a:solidFill>
               <a:latin typeface="Consolas" panose="020B0609020204030204"/>
             </a:endParaRPr>
           </a:p>
           <a:p>
-            <a:pPr algn="l"/>
             <a:r>
               <a:rPr sz="1000">
-                <a:solidFill>
-                  <a:srgbClr val="283C50"/>
-                </a:solidFill>
                 <a:latin typeface="Consolas" panose="020B0609020204030204"/>
               </a:rPr>
-              <a:t>void cancelOrder_shouldRedirectWhenLoginUserOwnsOrder() {</a:t>
+              <a:t>void shouldLoginNormalUserAndStoreSession() throws Exception {</a:t>
             </a:r>
             <a:endParaRPr sz="1000">
-              <a:solidFill>
-                <a:srgbClr val="283C50"/>
-              </a:solidFill>
               <a:latin typeface="Consolas" panose="020B0609020204030204"/>
             </a:endParaRPr>
           </a:p>
           <a:p>
-            <a:pPr algn="l"/>
             <a:r>
               <a:rPr sz="1000">
-                <a:solidFill>
-                  <a:srgbClr val="283C50"/>
-                </a:solidFill>
                 <a:latin typeface="Consolas" panose="020B0609020204030204"/>
               </a:rPr>
-              <a:t>    mockMvc.perform(get("/order/cancel")</a:t>
+              <a:t>    MvcResult result = mockMvc.perform(post("/loginCheck.do")</a:t>
             </a:r>
             <a:endParaRPr sz="1000">
-              <a:solidFill>
-                <a:srgbClr val="283C50"/>
-              </a:solidFill>
               <a:latin typeface="Consolas" panose="020B0609020204030204"/>
             </a:endParaRPr>
           </a:p>
           <a:p>
-            <a:pPr algn="l"/>
             <a:r>
               <a:rPr sz="1000">
-                <a:solidFill>
-                  <a:srgbClr val="283C50"/>
-                </a:solidFill>
                 <a:latin typeface="Consolas" panose="020B0609020204030204"/>
               </a:rPr>
-              <a:t>        .param("orderID", "1")</a:t>
+              <a:t>            .param("userID", normalUser.getUserID())</a:t>
             </a:r>
             <a:endParaRPr sz="1000">
-              <a:solidFill>
-                <a:srgbClr val="283C50"/>
-              </a:solidFill>
               <a:latin typeface="Consolas" panose="020B0609020204030204"/>
             </a:endParaRPr>
           </a:p>
           <a:p>
-            <a:pPr algn="l"/>
             <a:r>
               <a:rPr sz="1000">
-                <a:solidFill>
-                  <a:srgbClr val="283C50"/>
-                </a:solidFill>
                 <a:latin typeface="Consolas" panose="020B0609020204030204"/>
               </a:rPr>
-              <a:t>        .sessionAttr("user", user))</a:t>
+              <a:t>            .param("password", "pwd1"))</a:t>
             </a:r>
             <a:endParaRPr sz="1000">
-              <a:solidFill>
-                <a:srgbClr val="283C50"/>
-              </a:solidFill>
               <a:latin typeface="Consolas" panose="020B0609020204030204"/>
             </a:endParaRPr>
           </a:p>
           <a:p>
-            <a:pPr algn="l"/>
             <a:r>
               <a:rPr sz="1000">
-                <a:solidFill>
-                  <a:srgbClr val="283C50"/>
-                </a:solidFill>
                 <a:latin typeface="Consolas" panose="020B0609020204030204"/>
               </a:rPr>
-              <a:t>      .andExpect(status().is3xxRedirection())</a:t>
+              <a:t>        .andExpect(status().isOk())</a:t>
             </a:r>
             <a:endParaRPr sz="1000">
-              <a:solidFill>
-                <a:srgbClr val="283C50"/>
-              </a:solidFill>
               <a:latin typeface="Consolas" panose="020B0609020204030204"/>
             </a:endParaRPr>
           </a:p>
           <a:p>
-            <a:pPr algn="l"/>
             <a:r>
               <a:rPr sz="1000">
-                <a:solidFill>
-                  <a:srgbClr val="283C50"/>
-                </a:solidFill>
                 <a:latin typeface="Consolas" panose="020B0609020204030204"/>
               </a:rPr>
-              <a:t>      .andExpect(redirectedUrl("/order/list"));</a:t>
+              <a:t>        .andExpect(content().string("/index"))</a:t>
             </a:r>
             <a:endParaRPr sz="1000">
-              <a:solidFill>
-                <a:srgbClr val="283C50"/>
-              </a:solidFill>
               <a:latin typeface="Consolas" panose="020B0609020204030204"/>
             </a:endParaRPr>
           </a:p>
           <a:p>
-            <a:pPr algn="l"/>
             <a:r>
               <a:rPr sz="1000">
-                <a:solidFill>
-                  <a:srgbClr val="283C50"/>
-                </a:solidFill>
+                <a:latin typeface="Consolas" panose="020B0609020204030204"/>
+              </a:rPr>
+              <a:t>        .andReturn();</a:t>
+            </a:r>
+            <a:endParaRPr sz="1000">
+              <a:latin typeface="Consolas" panose="020B0609020204030204"/>
+            </a:endParaRPr>
+          </a:p>
+          <a:p>
+            <a:r>
+              <a:rPr sz="1000">
+                <a:latin typeface="Consolas" panose="020B0609020204030204"/>
+              </a:rPr>
+              <a:t>    User sessionUser = (User) result.getRequest().getSession().getAttribute("user");</a:t>
+            </a:r>
+            <a:endParaRPr sz="1000">
+              <a:latin typeface="Consolas" panose="020B0609020204030204"/>
+            </a:endParaRPr>
+          </a:p>
+          <a:p>
+            <a:r>
+              <a:rPr sz="1000">
+                <a:latin typeface="Consolas" panose="020B0609020204030204"/>
+              </a:rPr>
+              <a:t>    assertThat(sessionUser.getUserID()).isEqualTo(normalUser.getUserID());</a:t>
+            </a:r>
+            <a:endParaRPr sz="1000">
+              <a:latin typeface="Consolas" panose="020B0609020204030204"/>
+            </a:endParaRPr>
+          </a:p>
+          <a:p>
+            <a:r>
+              <a:rPr sz="1000">
                 <a:latin typeface="Consolas" panose="020B0609020204030204"/>
               </a:rPr>
               <a:t>}</a:t>
             </a:r>
             <a:endParaRPr sz="1000">
-              <a:solidFill>
-                <a:srgbClr val="283C50"/>
-              </a:solidFill>
               <a:latin typeface="Consolas" panose="020B0609020204030204"/>
             </a:endParaRPr>
           </a:p>
@@ -7323,7 +6732,7 @@
             <a:avLst/>
           </a:prstGeom>
           <a:solidFill>
-            <a:srgbClr val="F7F9FC"/>
+            <a:srgbClr val="F5F5F5"/>
           </a:solidFill>
           <a:ln w="6350">
             <a:solidFill>
@@ -7349,109 +6758,9 @@
           <a:bodyPr rtlCol="0" anchor="ctr"/>
           <a:lstStyle/>
           <a:p>
-            <a:pPr algn="l"/>
-            <a:r>
-              <a:rPr sz="1000">
-                <a:solidFill>
-                  <a:srgbClr val="283C50"/>
-                </a:solidFill>
-                <a:latin typeface="Consolas" panose="020B0609020204030204"/>
-              </a:rPr>
-              <a:t>@Test</a:t>
-            </a:r>
-            <a:endParaRPr sz="1000">
+            <a:endParaRPr sz="1000" b="1">
               <a:solidFill>
-                <a:srgbClr val="283C50"/>
-              </a:solidFill>
-              <a:latin typeface="Consolas" panose="020B0609020204030204"/>
-            </a:endParaRPr>
-          </a:p>
-          <a:p>
-            <a:pPr algn="l"/>
-            <a:r>
-              <a:rPr sz="1000">
-                <a:solidFill>
-                  <a:srgbClr val="283C50"/>
-                </a:solidFill>
-                <a:latin typeface="Consolas" panose="020B0609020204030204"/>
-              </a:rPr>
-              <a:t>void checkLogin_shouldReturnNullWhenPasswordMismatch() {</a:t>
-            </a:r>
-            <a:endParaRPr sz="1000">
-              <a:solidFill>
-                <a:srgbClr val="283C50"/>
-              </a:solidFill>
-              <a:latin typeface="Consolas" panose="020B0609020204030204"/>
-            </a:endParaRPr>
-          </a:p>
-          <a:p>
-            <a:pPr algn="l"/>
-            <a:r>
-              <a:rPr sz="1000">
-                <a:solidFill>
-                  <a:srgbClr val="283C50"/>
-                </a:solidFill>
-                <a:latin typeface="Consolas" panose="020B0609020204030204"/>
-              </a:rPr>
-              <a:t>    when(userDao.getUser("u01")).thenReturn(user);</a:t>
-            </a:r>
-            <a:endParaRPr sz="1000">
-              <a:solidFill>
-                <a:srgbClr val="283C50"/>
-              </a:solidFill>
-              <a:latin typeface="Consolas" panose="020B0609020204030204"/>
-            </a:endParaRPr>
-          </a:p>
-          <a:p>
-            <a:pPr algn="l"/>
-            <a:r>
-              <a:rPr sz="1000">
-                <a:solidFill>
-                  <a:srgbClr val="283C50"/>
-                </a:solidFill>
-                <a:latin typeface="Consolas" panose="020B0609020204030204"/>
-              </a:rPr>
-              <a:t>    User result = userService.checkLogin("u01", "bad");</a:t>
-            </a:r>
-            <a:endParaRPr sz="1000">
-              <a:solidFill>
-                <a:srgbClr val="283C50"/>
-              </a:solidFill>
-              <a:latin typeface="Consolas" panose="020B0609020204030204"/>
-            </a:endParaRPr>
-          </a:p>
-          <a:p>
-            <a:pPr algn="l"/>
-            <a:r>
-              <a:rPr sz="1000">
-                <a:solidFill>
-                  <a:srgbClr val="283C50"/>
-                </a:solidFill>
-                <a:latin typeface="Consolas" panose="020B0609020204030204"/>
-              </a:rPr>
-              <a:t>    assertNull(result);</a:t>
-            </a:r>
-            <a:endParaRPr sz="1000">
-              <a:solidFill>
-                <a:srgbClr val="283C50"/>
-              </a:solidFill>
-              <a:latin typeface="Consolas" panose="020B0609020204030204"/>
-            </a:endParaRPr>
-          </a:p>
-          <a:p>
-            <a:pPr algn="l"/>
-            <a:r>
-              <a:rPr sz="1000">
-                <a:solidFill>
-                  <a:srgbClr val="283C50"/>
-                </a:solidFill>
-                <a:latin typeface="Consolas" panose="020B0609020204030204"/>
-              </a:rPr>
-              <a:t>}</a:t>
-            </a:r>
-            <a:endParaRPr sz="1000">
-              <a:solidFill>
-                <a:srgbClr val="283C50"/>
+                <a:srgbClr val="FF0000"/>
               </a:solidFill>
               <a:latin typeface="Consolas" panose="020B0609020204030204"/>
             </a:endParaRPr>
@@ -7475,48 +6784,82 @@
           <a:noFill/>
         </p:spPr>
         <p:txBody>
-          <a:bodyPr wrap="none">
+          <a:bodyPr wrap="none" anchor="ctr">
             <a:normAutofit/>
           </a:bodyPr>
           <a:lstStyle/>
           <a:p>
-            <a:pPr algn="ctr"/>
             <a:r>
-              <a:rPr sz="1600" b="0">
-                <a:solidFill>
-                  <a:srgbClr val="AB4824"/>
-                </a:solidFill>
-                <a:latin typeface="微软雅黑" panose="020B0503020204020204" charset="-122"/>
-              </a:rPr>
-              <a:t>左侧：controller 集成测试路径校验</a:t>
+              <a:rPr sz="1600"/>
+              <a:t>左侧： UserController 集成测试，校验登录返回和 session 写入</a:t>
             </a:r>
-            <a:endParaRPr sz="1600" b="0">
-              <a:solidFill>
-                <a:srgbClr val="AB4824"/>
-              </a:solidFill>
-              <a:latin typeface="微软雅黑" panose="020B0503020204020204" charset="-122"/>
-            </a:endParaRPr>
-          </a:p>
-          <a:p>
-            <a:pPr algn="ctr"/>
+            <a:endParaRPr sz="1600"/>
+          </a:p>
+          <a:p>
             <a:r>
-              <a:rPr sz="1600" b="0">
-                <a:solidFill>
-                  <a:srgbClr val="AB4824"/>
-                </a:solidFill>
-                <a:latin typeface="微软雅黑" panose="020B0503020204020204" charset="-122"/>
-              </a:rPr>
-              <a:t>右侧：service 单元测试分支校验</a:t>
+              <a:rPr sz="1600"/>
+              <a:t>右侧： UserServiceImpl 单元测试，校验 create 保存和计数逻辑</a:t>
             </a:r>
-            <a:endParaRPr sz="1600" b="0">
-              <a:solidFill>
-                <a:srgbClr val="AB4824"/>
-              </a:solidFill>
-              <a:latin typeface="微软雅黑" panose="020B0503020204020204" charset="-122"/>
-            </a:endParaRPr>
-          </a:p>
-        </p:txBody>
-      </p:sp>
+            <a:endParaRPr sz="1600"/>
+          </a:p>
+        </p:txBody>
+      </p:sp>
+      <p:pic>
+        <p:nvPicPr>
+          <p:cNvPr id="14" name="图片 13"/>
+          <p:cNvPicPr>
+            <a:picLocks noChangeAspect="1"/>
+          </p:cNvPicPr>
+          <p:nvPr>
+            <p:custDataLst>
+              <p:tags r:id="rId1"/>
+            </p:custDataLst>
+          </p:nvPr>
+        </p:nvPicPr>
+        <p:blipFill>
+          <a:blip r:embed="rId2"/>
+          <a:stretch>
+            <a:fillRect/>
+          </a:stretch>
+        </p:blipFill>
+        <p:spPr>
+          <a:xfrm>
+            <a:off x="640080" y="1854835"/>
+            <a:ext cx="5298440" cy="1918970"/>
+          </a:xfrm>
+          <a:prstGeom prst="rect">
+            <a:avLst/>
+          </a:prstGeom>
+        </p:spPr>
+      </p:pic>
+      <p:pic>
+        <p:nvPicPr>
+          <p:cNvPr id="15" name="图片 14"/>
+          <p:cNvPicPr>
+            <a:picLocks noChangeAspect="1"/>
+          </p:cNvPicPr>
+          <p:nvPr>
+            <p:custDataLst>
+              <p:tags r:id="rId3"/>
+            </p:custDataLst>
+          </p:nvPr>
+        </p:nvPicPr>
+        <p:blipFill>
+          <a:blip r:embed="rId4"/>
+          <a:stretch>
+            <a:fillRect/>
+          </a:stretch>
+        </p:blipFill>
+        <p:spPr>
+          <a:xfrm>
+            <a:off x="6259830" y="2200910"/>
+            <a:ext cx="5219065" cy="1226820"/>
+          </a:xfrm>
+          <a:prstGeom prst="rect">
+            <a:avLst/>
+          </a:prstGeom>
+        </p:spPr>
+      </p:pic>
     </p:spTree>
   </p:cSld>
   <p:clrMapOvr>
@@ -7833,46 +7176,6 @@
           <a:lstStyle/>
           <a:p>
             <a:pPr algn="ctr"/>
-          </a:p>
-        </p:txBody>
-      </p:sp>
-      <p:sp>
-        <p:nvSpPr>
-          <p:cNvPr id="9" name="TextBox 8"/>
-          <p:cNvSpPr txBox="1"/>
-          <p:nvPr/>
-        </p:nvSpPr>
-        <p:spPr>
-          <a:xfrm>
-            <a:off x="228600" y="6419088"/>
-            <a:ext cx="1280160" cy="164592"/>
-          </a:xfrm>
-          <a:prstGeom prst="rect">
-            <a:avLst/>
-          </a:prstGeom>
-          <a:noFill/>
-        </p:spPr>
-        <p:txBody>
-          <a:bodyPr wrap="none">
-            <a:spAutoFit/>
-          </a:bodyPr>
-          <a:lstStyle/>
-          <a:p>
-            <a:r>
-              <a:rPr sz="700" b="0">
-                <a:solidFill>
-                  <a:srgbClr val="000000"/>
-                </a:solidFill>
-                <a:latin typeface="微软雅黑" panose="020B0503020204020204" charset="-122"/>
-              </a:rPr>
-              <a:t>图表15</a:t>
-            </a:r>
-            <a:endParaRPr sz="700" b="0">
-              <a:solidFill>
-                <a:srgbClr val="000000"/>
-              </a:solidFill>
-              <a:latin typeface="微软雅黑" panose="020B0503020204020204" charset="-122"/>
-            </a:endParaRPr>
           </a:p>
         </p:txBody>
       </p:sp>
@@ -9224,46 +8527,6 @@
       </p:sp>
       <p:sp>
         <p:nvSpPr>
-          <p:cNvPr id="9" name="TextBox 8"/>
-          <p:cNvSpPr txBox="1"/>
-          <p:nvPr/>
-        </p:nvSpPr>
-        <p:spPr>
-          <a:xfrm>
-            <a:off x="228600" y="6419088"/>
-            <a:ext cx="1280160" cy="164592"/>
-          </a:xfrm>
-          <a:prstGeom prst="rect">
-            <a:avLst/>
-          </a:prstGeom>
-          <a:noFill/>
-        </p:spPr>
-        <p:txBody>
-          <a:bodyPr wrap="none">
-            <a:spAutoFit/>
-          </a:bodyPr>
-          <a:lstStyle/>
-          <a:p>
-            <a:r>
-              <a:rPr sz="700" b="0">
-                <a:solidFill>
-                  <a:srgbClr val="000000"/>
-                </a:solidFill>
-                <a:latin typeface="微软雅黑" panose="020B0503020204020204" charset="-122"/>
-              </a:rPr>
-              <a:t>图表16</a:t>
-            </a:r>
-            <a:endParaRPr sz="700" b="0">
-              <a:solidFill>
-                <a:srgbClr val="000000"/>
-              </a:solidFill>
-              <a:latin typeface="微软雅黑" panose="020B0503020204020204" charset="-122"/>
-            </a:endParaRPr>
-          </a:p>
-        </p:txBody>
-      </p:sp>
-      <p:sp>
-        <p:nvSpPr>
           <p:cNvPr id="10" name="TextBox 9"/>
           <p:cNvSpPr txBox="1"/>
           <p:nvPr/>
@@ -10610,46 +9873,6 @@
       </p:sp>
       <p:sp>
         <p:nvSpPr>
-          <p:cNvPr id="9" name="TextBox 8"/>
-          <p:cNvSpPr txBox="1"/>
-          <p:nvPr/>
-        </p:nvSpPr>
-        <p:spPr>
-          <a:xfrm>
-            <a:off x="228600" y="6419088"/>
-            <a:ext cx="1280160" cy="164592"/>
-          </a:xfrm>
-          <a:prstGeom prst="rect">
-            <a:avLst/>
-          </a:prstGeom>
-          <a:noFill/>
-        </p:spPr>
-        <p:txBody>
-          <a:bodyPr wrap="none">
-            <a:spAutoFit/>
-          </a:bodyPr>
-          <a:lstStyle/>
-          <a:p>
-            <a:r>
-              <a:rPr sz="700" b="0">
-                <a:solidFill>
-                  <a:srgbClr val="000000"/>
-                </a:solidFill>
-                <a:latin typeface="微软雅黑" panose="020B0503020204020204" charset="-122"/>
-              </a:rPr>
-              <a:t>图表17</a:t>
-            </a:r>
-            <a:endParaRPr sz="700" b="0">
-              <a:solidFill>
-                <a:srgbClr val="000000"/>
-              </a:solidFill>
-              <a:latin typeface="微软雅黑" panose="020B0503020204020204" charset="-122"/>
-            </a:endParaRPr>
-          </a:p>
-        </p:txBody>
-      </p:sp>
-      <p:sp>
-        <p:nvSpPr>
           <p:cNvPr id="10" name="TextBox 9"/>
           <p:cNvSpPr txBox="1"/>
           <p:nvPr/>
@@ -11996,46 +11219,6 @@
       </p:sp>
       <p:sp>
         <p:nvSpPr>
-          <p:cNvPr id="9" name="TextBox 8"/>
-          <p:cNvSpPr txBox="1"/>
-          <p:nvPr/>
-        </p:nvSpPr>
-        <p:spPr>
-          <a:xfrm>
-            <a:off x="228600" y="6419088"/>
-            <a:ext cx="1280160" cy="164592"/>
-          </a:xfrm>
-          <a:prstGeom prst="rect">
-            <a:avLst/>
-          </a:prstGeom>
-          <a:noFill/>
-        </p:spPr>
-        <p:txBody>
-          <a:bodyPr wrap="none">
-            <a:spAutoFit/>
-          </a:bodyPr>
-          <a:lstStyle/>
-          <a:p>
-            <a:r>
-              <a:rPr sz="700" b="0">
-                <a:solidFill>
-                  <a:srgbClr val="000000"/>
-                </a:solidFill>
-                <a:latin typeface="微软雅黑" panose="020B0503020204020204" charset="-122"/>
-              </a:rPr>
-              <a:t>图表18</a:t>
-            </a:r>
-            <a:endParaRPr sz="700" b="0">
-              <a:solidFill>
-                <a:srgbClr val="000000"/>
-              </a:solidFill>
-              <a:latin typeface="微软雅黑" panose="020B0503020204020204" charset="-122"/>
-            </a:endParaRPr>
-          </a:p>
-        </p:txBody>
-      </p:sp>
-      <p:sp>
-        <p:nvSpPr>
           <p:cNvPr id="10" name="TextBox 9"/>
           <p:cNvSpPr txBox="1"/>
           <p:nvPr/>
@@ -13382,46 +12565,6 @@
       </p:sp>
       <p:sp>
         <p:nvSpPr>
-          <p:cNvPr id="9" name="TextBox 8"/>
-          <p:cNvSpPr txBox="1"/>
-          <p:nvPr/>
-        </p:nvSpPr>
-        <p:spPr>
-          <a:xfrm>
-            <a:off x="228600" y="6419088"/>
-            <a:ext cx="1280160" cy="164592"/>
-          </a:xfrm>
-          <a:prstGeom prst="rect">
-            <a:avLst/>
-          </a:prstGeom>
-          <a:noFill/>
-        </p:spPr>
-        <p:txBody>
-          <a:bodyPr wrap="none">
-            <a:spAutoFit/>
-          </a:bodyPr>
-          <a:lstStyle/>
-          <a:p>
-            <a:r>
-              <a:rPr sz="700" b="0">
-                <a:solidFill>
-                  <a:srgbClr val="000000"/>
-                </a:solidFill>
-                <a:latin typeface="微软雅黑" panose="020B0503020204020204" charset="-122"/>
-              </a:rPr>
-              <a:t>图表19</a:t>
-            </a:r>
-            <a:endParaRPr sz="700" b="0">
-              <a:solidFill>
-                <a:srgbClr val="000000"/>
-              </a:solidFill>
-              <a:latin typeface="微软雅黑" panose="020B0503020204020204" charset="-122"/>
-            </a:endParaRPr>
-          </a:p>
-        </p:txBody>
-      </p:sp>
-      <p:sp>
-        <p:nvSpPr>
           <p:cNvPr id="10" name="TextBox 9"/>
           <p:cNvSpPr txBox="1"/>
           <p:nvPr/>
@@ -14743,46 +13886,6 @@
       </p:sp>
       <p:sp>
         <p:nvSpPr>
-          <p:cNvPr id="9" name="TextBox 8"/>
-          <p:cNvSpPr txBox="1"/>
-          <p:nvPr/>
-        </p:nvSpPr>
-        <p:spPr>
-          <a:xfrm>
-            <a:off x="228600" y="6419088"/>
-            <a:ext cx="1280160" cy="164592"/>
-          </a:xfrm>
-          <a:prstGeom prst="rect">
-            <a:avLst/>
-          </a:prstGeom>
-          <a:noFill/>
-        </p:spPr>
-        <p:txBody>
-          <a:bodyPr wrap="none">
-            <a:spAutoFit/>
-          </a:bodyPr>
-          <a:lstStyle/>
-          <a:p>
-            <a:r>
-              <a:rPr sz="700" b="0">
-                <a:solidFill>
-                  <a:srgbClr val="000000"/>
-                </a:solidFill>
-                <a:latin typeface="微软雅黑" panose="020B0503020204020204" charset="-122"/>
-              </a:rPr>
-              <a:t>图表2</a:t>
-            </a:r>
-            <a:endParaRPr sz="700" b="0">
-              <a:solidFill>
-                <a:srgbClr val="000000"/>
-              </a:solidFill>
-              <a:latin typeface="微软雅黑" panose="020B0503020204020204" charset="-122"/>
-            </a:endParaRPr>
-          </a:p>
-        </p:txBody>
-      </p:sp>
-      <p:sp>
-        <p:nvSpPr>
           <p:cNvPr id="10" name="TextBox 9"/>
           <p:cNvSpPr txBox="1"/>
           <p:nvPr/>
@@ -15353,46 +14456,6 @@
           <a:lstStyle/>
           <a:p>
             <a:pPr algn="ctr"/>
-          </a:p>
-        </p:txBody>
-      </p:sp>
-      <p:sp>
-        <p:nvSpPr>
-          <p:cNvPr id="9" name="TextBox 8"/>
-          <p:cNvSpPr txBox="1"/>
-          <p:nvPr/>
-        </p:nvSpPr>
-        <p:spPr>
-          <a:xfrm>
-            <a:off x="228600" y="6419088"/>
-            <a:ext cx="1280160" cy="164592"/>
-          </a:xfrm>
-          <a:prstGeom prst="rect">
-            <a:avLst/>
-          </a:prstGeom>
-          <a:noFill/>
-        </p:spPr>
-        <p:txBody>
-          <a:bodyPr wrap="none">
-            <a:spAutoFit/>
-          </a:bodyPr>
-          <a:lstStyle/>
-          <a:p>
-            <a:r>
-              <a:rPr sz="700" b="0">
-                <a:solidFill>
-                  <a:srgbClr val="000000"/>
-                </a:solidFill>
-                <a:latin typeface="微软雅黑" panose="020B0503020204020204" charset="-122"/>
-              </a:rPr>
-              <a:t>图表20</a:t>
-            </a:r>
-            <a:endParaRPr sz="700" b="0">
-              <a:solidFill>
-                <a:srgbClr val="000000"/>
-              </a:solidFill>
-              <a:latin typeface="微软雅黑" panose="020B0503020204020204" charset="-122"/>
-            </a:endParaRPr>
           </a:p>
         </p:txBody>
       </p:sp>
@@ -16744,46 +15807,6 @@
       </p:sp>
       <p:sp>
         <p:nvSpPr>
-          <p:cNvPr id="9" name="TextBox 8"/>
-          <p:cNvSpPr txBox="1"/>
-          <p:nvPr/>
-        </p:nvSpPr>
-        <p:spPr>
-          <a:xfrm>
-            <a:off x="228600" y="6419088"/>
-            <a:ext cx="1280160" cy="164592"/>
-          </a:xfrm>
-          <a:prstGeom prst="rect">
-            <a:avLst/>
-          </a:prstGeom>
-          <a:noFill/>
-        </p:spPr>
-        <p:txBody>
-          <a:bodyPr wrap="none">
-            <a:spAutoFit/>
-          </a:bodyPr>
-          <a:lstStyle/>
-          <a:p>
-            <a:r>
-              <a:rPr sz="700" b="0">
-                <a:solidFill>
-                  <a:srgbClr val="000000"/>
-                </a:solidFill>
-                <a:latin typeface="微软雅黑" panose="020B0503020204020204" charset="-122"/>
-              </a:rPr>
-              <a:t>图表21</a:t>
-            </a:r>
-            <a:endParaRPr sz="700" b="0">
-              <a:solidFill>
-                <a:srgbClr val="000000"/>
-              </a:solidFill>
-              <a:latin typeface="微软雅黑" panose="020B0503020204020204" charset="-122"/>
-            </a:endParaRPr>
-          </a:p>
-        </p:txBody>
-      </p:sp>
-      <p:sp>
-        <p:nvSpPr>
           <p:cNvPr id="10" name="TextBox 9"/>
           <p:cNvSpPr txBox="1"/>
           <p:nvPr/>
@@ -16830,8 +15853,8 @@
         </p:nvSpPr>
         <p:spPr>
           <a:xfrm>
-            <a:off x="914400" y="1600200"/>
-            <a:ext cx="10058400" cy="4206240"/>
+            <a:off x="641350" y="2089785"/>
+            <a:ext cx="10555605" cy="2350135"/>
           </a:xfrm>
           <a:prstGeom prst="rect">
             <a:avLst/>
@@ -16839,94 +15862,53 @@
           <a:noFill/>
         </p:spPr>
         <p:txBody>
-          <a:bodyPr wrap="none">
+          <a:bodyPr wrap="none" anchor="ctr">
             <a:normAutofit/>
           </a:bodyPr>
           <a:lstStyle/>
           <a:p>
+            <a:pPr algn="l"/>
             <a:r>
-              <a:rPr sz="1500" b="0">
-                <a:solidFill>
-                  <a:srgbClr val="000000"/>
-                </a:solidFill>
-                <a:latin typeface="微软雅黑" panose="020B0503020204020204" charset="-122"/>
-              </a:rPr>
-              <a:t>• 本次测试已覆盖 service 与 controller 的核心功能链路，自动化脚本可重复执行。</a:t>
+              <a:rPr sz="1700"/>
+              <a:t>• 本次测试围绕 SoftwareTestingDemo 核心业务展开，覆盖 service 单元测试和 controller 集成测试</a:t>
             </a:r>
-            <a:endParaRPr sz="1500" b="0">
-              <a:solidFill>
-                <a:srgbClr val="000000"/>
-              </a:solidFill>
-              <a:latin typeface="微软雅黑" panose="020B0503020204020204" charset="-122"/>
-            </a:endParaRPr>
-          </a:p>
-          <a:p>
             <a:r>
-              <a:rPr sz="1500" b="0">
-                <a:solidFill>
-                  <a:srgbClr val="000000"/>
-                </a:solidFill>
-                <a:latin typeface="微软雅黑" panose="020B0503020204020204" charset="-122"/>
-              </a:rPr>
-              <a:t>• 128 条测试全部通过，整体指令覆盖率 92.54%，分支覆盖率 80.77%，满足测试计划出口准则。</a:t>
+              <a:rPr lang="zh-CN" sz="1700"/>
+              <a:t>。</a:t>
             </a:r>
-            <a:endParaRPr sz="1500" b="0">
-              <a:solidFill>
-                <a:srgbClr val="000000"/>
-              </a:solidFill>
-              <a:latin typeface="微软雅黑" panose="020B0503020204020204" charset="-122"/>
-            </a:endParaRPr>
-          </a:p>
-          <a:p>
+            <a:endParaRPr lang="zh-CN" sz="1700"/>
+          </a:p>
+          <a:p>
+            <a:pPr algn="l"/>
             <a:r>
-              <a:rPr sz="1500" b="0">
-                <a:solidFill>
-                  <a:srgbClr val="000000"/>
-                </a:solidFill>
-                <a:latin typeface="微软雅黑" panose="020B0503020204020204" charset="-122"/>
-              </a:rPr>
-              <a:t>• 用例设计同时体现等价类划分、边界值分析、语句覆盖与判定覆盖，兼顾完整性与冗余控制。</a:t>
+              <a:rPr sz="1700"/>
+              <a:t>• 正式回归 147 条用例全部通过，JaCoCo 指令、分支、行、方法覆盖率均为 100%。</a:t>
             </a:r>
-            <a:endParaRPr sz="1500" b="0">
-              <a:solidFill>
-                <a:srgbClr val="000000"/>
-              </a:solidFill>
-              <a:latin typeface="微软雅黑" panose="020B0503020204020204" charset="-122"/>
-            </a:endParaRPr>
-          </a:p>
-          <a:p>
+            <a:endParaRPr sz="1700"/>
+          </a:p>
+          <a:p>
+            <a:pPr algn="l"/>
             <a:r>
-              <a:rPr sz="1500" b="0">
-                <a:solidFill>
-                  <a:srgbClr val="000000"/>
-                </a:solidFill>
-                <a:latin typeface="微软雅黑" panose="020B0503020204020204" charset="-122"/>
-              </a:rPr>
-              <a:t>• 当前范围不包含浏览器 UI 自动化、性能测试和真实 MySQL 差异验证，这些已在《测试总结》中列为后续优化方向。</a:t>
+              <a:rPr sz="1700"/>
+              <a:t>• 另设计 6 条探索性失败用例，发现后台鉴权、参数边界和密码明文存储等风险。</a:t>
             </a:r>
-            <a:endParaRPr sz="1500" b="0">
-              <a:solidFill>
-                <a:srgbClr val="000000"/>
-              </a:solidFill>
-              <a:latin typeface="微软雅黑" panose="020B0503020204020204" charset="-122"/>
-            </a:endParaRPr>
-          </a:p>
-          <a:p>
+            <a:endParaRPr sz="1700"/>
+          </a:p>
+          <a:p>
+            <a:pPr algn="l"/>
             <a:r>
-              <a:rPr sz="1500" b="0">
-                <a:solidFill>
-                  <a:srgbClr val="000000"/>
-                </a:solidFill>
-                <a:latin typeface="微软雅黑" panose="020B0503020204020204" charset="-122"/>
-              </a:rPr>
-              <a:t>• 提交前建议再次执行 mvn test，并将三份文档 PDF 与源码统一打包为 PJ1-小组编号.zip。</a:t>
+              <a:rPr sz="1700"/>
+              <a:t>• 探索用例不纳入默认 mvn test 统计，作为缺陷记录和后续修复方向。</a:t>
             </a:r>
-            <a:endParaRPr sz="1500" b="0">
-              <a:solidFill>
-                <a:srgbClr val="000000"/>
-              </a:solidFill>
-              <a:latin typeface="微软雅黑" panose="020B0503020204020204" charset="-122"/>
-            </a:endParaRPr>
+            <a:endParaRPr sz="1700"/>
+          </a:p>
+          <a:p>
+            <a:pPr algn="l"/>
+            <a:r>
+              <a:rPr sz="1700"/>
+              <a:t>• 后续可补浏览器 UI 自动化、性能测试和真实 MySQL 环境回归。</a:t>
+            </a:r>
+            <a:endParaRPr sz="1700"/>
           </a:p>
         </p:txBody>
       </p:sp>
@@ -17251,46 +16233,6 @@
       </p:sp>
       <p:sp>
         <p:nvSpPr>
-          <p:cNvPr id="9" name="TextBox 8"/>
-          <p:cNvSpPr txBox="1"/>
-          <p:nvPr/>
-        </p:nvSpPr>
-        <p:spPr>
-          <a:xfrm>
-            <a:off x="228600" y="6419088"/>
-            <a:ext cx="1280160" cy="164592"/>
-          </a:xfrm>
-          <a:prstGeom prst="rect">
-            <a:avLst/>
-          </a:prstGeom>
-          <a:noFill/>
-        </p:spPr>
-        <p:txBody>
-          <a:bodyPr wrap="none">
-            <a:spAutoFit/>
-          </a:bodyPr>
-          <a:lstStyle/>
-          <a:p>
-            <a:r>
-              <a:rPr sz="700" b="0">
-                <a:solidFill>
-                  <a:srgbClr val="000000"/>
-                </a:solidFill>
-                <a:latin typeface="微软雅黑" panose="020B0503020204020204" charset="-122"/>
-              </a:rPr>
-              <a:t>图表3</a:t>
-            </a:r>
-            <a:endParaRPr sz="700" b="0">
-              <a:solidFill>
-                <a:srgbClr val="000000"/>
-              </a:solidFill>
-              <a:latin typeface="微软雅黑" panose="020B0503020204020204" charset="-122"/>
-            </a:endParaRPr>
-          </a:p>
-        </p:txBody>
-      </p:sp>
-      <p:sp>
-        <p:nvSpPr>
           <p:cNvPr id="10" name="TextBox 9"/>
           <p:cNvSpPr txBox="1"/>
           <p:nvPr/>
@@ -17346,94 +16288,51 @@
           <a:noFill/>
         </p:spPr>
         <p:txBody>
-          <a:bodyPr wrap="none">
+          <a:bodyPr wrap="none" anchor="ctr">
             <a:normAutofit/>
           </a:bodyPr>
           <a:lstStyle/>
           <a:p>
             <a:r>
-              <a:rPr sz="1700" b="1">
-                <a:solidFill>
-                  <a:srgbClr val="000000"/>
-                </a:solidFill>
-                <a:latin typeface="微软雅黑" panose="020B0503020204020204" charset="-122"/>
-              </a:rPr>
+              <a:rPr sz="1400"/>
               <a:t>测试项版本/修订号</a:t>
             </a:r>
-            <a:endParaRPr sz="1700" b="1">
-              <a:solidFill>
-                <a:srgbClr val="000000"/>
-              </a:solidFill>
-              <a:latin typeface="微软雅黑" panose="020B0503020204020204" charset="-122"/>
-            </a:endParaRPr>
+            <a:endParaRPr sz="1400"/>
           </a:p>
           <a:p>
             <a:r>
-              <a:rPr sz="1500" b="0">
-                <a:solidFill>
-                  <a:srgbClr val="000000"/>
-                </a:solidFill>
-                <a:latin typeface="微软雅黑" panose="020B0503020204020204" charset="-122"/>
-              </a:rPr>
-              <a:t>• service 层：7 个实现类，覆盖核心业务方法 45 个</a:t>
+              <a:rPr sz="1400"/>
+              <a:t>• service：7 个实现类，45 个业务方法</a:t>
             </a:r>
-            <a:endParaRPr sz="1500" b="0">
-              <a:solidFill>
-                <a:srgbClr val="000000"/>
-              </a:solidFill>
-              <a:latin typeface="微软雅黑" panose="020B0503020204020204" charset="-122"/>
-            </a:endParaRPr>
+            <a:endParaRPr sz="1400"/>
           </a:p>
           <a:p>
             <a:r>
-              <a:rPr sz="1500" b="0">
-                <a:solidFill>
-                  <a:srgbClr val="000000"/>
-                </a:solidFill>
-                <a:latin typeface="微软雅黑" panose="020B0503020204020204" charset="-122"/>
-              </a:rPr>
-              <a:t>• controller 层：11 类控制器，覆盖 65 个请求映射</a:t>
+              <a:rPr sz="1400"/>
+              <a:t>• controller：11 个控制器，65 个请求映射</a:t>
             </a:r>
-            <a:endParaRPr sz="1500" b="0">
-              <a:solidFill>
-                <a:srgbClr val="000000"/>
-              </a:solidFill>
-              <a:latin typeface="微软雅黑" panose="020B0503020204020204" charset="-122"/>
-            </a:endParaRPr>
+            <a:endParaRPr sz="1400"/>
           </a:p>
           <a:p>
             <a:r>
-              <a:rPr sz="1500" b="0">
-                <a:solidFill>
-                  <a:srgbClr val="000000"/>
-                </a:solidFill>
-                <a:latin typeface="微软雅黑" panose="020B0503020204020204" charset="-122"/>
-              </a:rPr>
-              <a:t>• 测试脚本：7 个 service 测试类 + 8 个 controller 集成测试类</a:t>
+              <a:rPr sz="1400"/>
+              <a:t>• 测试脚本：20 个测试类</a:t>
             </a:r>
-            <a:endParaRPr sz="1500" b="0">
-              <a:solidFill>
-                <a:srgbClr val="000000"/>
-              </a:solidFill>
-              <a:latin typeface="微软雅黑" panose="020B0503020204020204" charset="-122"/>
-            </a:endParaRPr>
+            <a:endParaRPr sz="1400"/>
           </a:p>
           <a:p>
             <a:r>
-              <a:rPr sz="1500" b="0">
-                <a:solidFill>
-                  <a:srgbClr val="000000"/>
-                </a:solidFill>
-                <a:latin typeface="微软雅黑" panose="020B0503020204020204" charset="-122"/>
-              </a:rPr>
-              <a:t>• 测试入口：项目根目录执行 mvn test</a:t>
+              <a:rPr sz="1400"/>
+              <a:t>  service 单测 7 个 / controller 集成 8 个 / 专项补充 5 个</a:t>
             </a:r>
-            <a:endParaRPr sz="1500" b="0">
-              <a:solidFill>
-                <a:srgbClr val="000000"/>
-              </a:solidFill>
-              <a:latin typeface="微软雅黑" panose="020B0503020204020204" charset="-122"/>
-            </a:endParaRPr>
+            <a:endParaRPr sz="1400"/>
+          </a:p>
+          <a:p>
+            <a:r>
+              <a:rPr sz="1400"/>
+              <a:t>• 入口：mvn test，Surefire 实际运行 147 条用例</a:t>
+            </a:r>
+            <a:endParaRPr sz="1400"/>
           </a:p>
         </p:txBody>
       </p:sp>
@@ -17454,94 +16353,44 @@
           <a:noFill/>
         </p:spPr>
         <p:txBody>
-          <a:bodyPr wrap="none">
+          <a:bodyPr wrap="none" anchor="ctr">
             <a:normAutofit/>
           </a:bodyPr>
           <a:lstStyle/>
           <a:p>
             <a:r>
-              <a:rPr sz="1700" b="1">
-                <a:solidFill>
-                  <a:srgbClr val="000000"/>
-                </a:solidFill>
-                <a:latin typeface="微软雅黑" panose="020B0503020204020204" charset="-122"/>
-              </a:rPr>
+              <a:rPr sz="1500"/>
               <a:t>其中的环境需求</a:t>
             </a:r>
-            <a:endParaRPr sz="1700" b="1">
-              <a:solidFill>
-                <a:srgbClr val="000000"/>
-              </a:solidFill>
-              <a:latin typeface="微软雅黑" panose="020B0503020204020204" charset="-122"/>
-            </a:endParaRPr>
+            <a:endParaRPr sz="1500"/>
           </a:p>
           <a:p>
             <a:r>
-              <a:rPr sz="1500" b="0">
-                <a:solidFill>
-                  <a:srgbClr val="000000"/>
-                </a:solidFill>
-                <a:latin typeface="微软雅黑" panose="020B0503020204020204" charset="-122"/>
-              </a:rPr>
+              <a:rPr sz="1500"/>
               <a:t>• JDK 8+、Maven、Spring Boot 2.2.2</a:t>
             </a:r>
-            <a:endParaRPr sz="1500" b="0">
-              <a:solidFill>
-                <a:srgbClr val="000000"/>
-              </a:solidFill>
-              <a:latin typeface="微软雅黑" panose="020B0503020204020204" charset="-122"/>
-            </a:endParaRPr>
+            <a:endParaRPr sz="1500"/>
           </a:p>
           <a:p>
             <a:r>
-              <a:rPr sz="1500" b="0">
-                <a:solidFill>
-                  <a:srgbClr val="000000"/>
-                </a:solidFill>
-                <a:latin typeface="微软雅黑" panose="020B0503020204020204" charset="-122"/>
-              </a:rPr>
-              <a:t>• H2 内存库启用 MySQL 兼容模式，不依赖本机 MySQL</a:t>
+              <a:rPr sz="1500"/>
+              <a:t>• H2 内存库，MySQL 兼容模式</a:t>
             </a:r>
-            <a:endParaRPr sz="1500" b="0">
-              <a:solidFill>
-                <a:srgbClr val="000000"/>
-              </a:solidFill>
-              <a:latin typeface="微软雅黑" panose="020B0503020204020204" charset="-122"/>
-            </a:endParaRPr>
+            <a:endParaRPr sz="1500"/>
           </a:p>
           <a:p>
             <a:r>
-              <a:rPr sz="1500" b="0">
-                <a:solidFill>
-                  <a:srgbClr val="000000"/>
-                </a:solidFill>
-                <a:latin typeface="微软雅黑" panose="020B0503020204020204" charset="-122"/>
-              </a:rPr>
-              <a:t>• JUnit5 + Mockito + MockMvc 作为自动化测试基座</a:t>
+              <a:rPr sz="1500"/>
+              <a:t>• JUnit5 + Mockito + MockMvc</a:t>
             </a:r>
-            <a:endParaRPr sz="1500" b="0">
-              <a:solidFill>
-                <a:srgbClr val="000000"/>
-              </a:solidFill>
-              <a:latin typeface="微软雅黑" panose="020B0503020204020204" charset="-122"/>
-            </a:endParaRPr>
+            <a:endParaRPr sz="1500"/>
           </a:p>
           <a:p>
             <a:r>
-              <a:rPr sz="1500" b="0">
-                <a:solidFill>
-                  <a:srgbClr val="000000"/>
-                </a:solidFill>
-                <a:latin typeface="微软雅黑" panose="020B0503020204020204" charset="-122"/>
-              </a:rPr>
-              <a:t>• JaCoCo 报告生成到 target/site/jacoco/index.html</a:t>
+              <a:rPr sz="1500"/>
+              <a:t>• JaCoCo 报告：target/site/jacoco/index.html</a:t>
             </a:r>
-            <a:endParaRPr sz="1500" b="0">
-              <a:solidFill>
-                <a:srgbClr val="000000"/>
-              </a:solidFill>
-              <a:latin typeface="微软雅黑" panose="020B0503020204020204" charset="-122"/>
-            </a:endParaRPr>
+            <a:endParaRPr sz="1500"/>
           </a:p>
         </p:txBody>
       </p:sp>
@@ -17866,14 +16715,18 @@
       </p:sp>
       <p:sp>
         <p:nvSpPr>
-          <p:cNvPr id="9" name="TextBox 8"/>
+          <p:cNvPr id="13" name="文本框 12"/>
           <p:cNvSpPr txBox="1"/>
-          <p:nvPr/>
-        </p:nvSpPr>
-        <p:spPr>
-          <a:xfrm>
-            <a:off x="228600" y="6419088"/>
-            <a:ext cx="1280160" cy="164592"/>
+          <p:nvPr>
+            <p:custDataLst>
+              <p:tags r:id="rId1"/>
+            </p:custDataLst>
+          </p:nvPr>
+        </p:nvSpPr>
+        <p:spPr>
+          <a:xfrm>
+            <a:off x="460621" y="820873"/>
+            <a:ext cx="3753240" cy="5156989"/>
           </a:xfrm>
           <a:prstGeom prst="rect">
             <a:avLst/>
@@ -17881,39 +16734,308 @@
           <a:noFill/>
         </p:spPr>
         <p:txBody>
-          <a:bodyPr wrap="none">
+          <a:bodyPr wrap="square">
             <a:spAutoFit/>
           </a:bodyPr>
-          <a:lstStyle/>
-          <a:p>
+          <a:p>
+            <a:pPr algn="just">
+              <a:lnSpc>
+                <a:spcPct val="150000"/>
+              </a:lnSpc>
+              <a:spcBef>
+                <a:spcPts val="1300"/>
+              </a:spcBef>
+              <a:spcAft>
+                <a:spcPts val="1300"/>
+              </a:spcAft>
+            </a:pPr>
             <a:r>
-              <a:rPr sz="700" b="0">
+              <a:rPr lang="zh-CN" altLang="zh-CN" sz="2400" b="1" kern="100" dirty="0">
+                <a:effectLst/>
+                <a:latin typeface="黑体" panose="02010609060101010101" pitchFamily="49" charset="-122"/>
+                <a:ea typeface="黑体" panose="02010609060101010101" pitchFamily="49" charset="-122"/>
+                <a:cs typeface="宋体" panose="02010600030101010101" pitchFamily="2" charset="-122"/>
+              </a:rPr>
+              <a:t>测试项通过</a:t>
+            </a:r>
+            <a:r>
+              <a:rPr lang="en-US" altLang="zh-CN" sz="2400" b="1" kern="100" dirty="0">
+                <a:effectLst/>
+                <a:latin typeface="黑体" panose="02010609060101010101" pitchFamily="49" charset="-122"/>
+                <a:ea typeface="黑体" panose="02010609060101010101" pitchFamily="49" charset="-122"/>
+                <a:cs typeface="宋体" panose="02010600030101010101" pitchFamily="2" charset="-122"/>
+              </a:rPr>
+              <a:t>/</a:t>
+            </a:r>
+            <a:r>
+              <a:rPr lang="zh-CN" altLang="zh-CN" sz="2400" b="1" kern="100" dirty="0">
+                <a:effectLst/>
+                <a:latin typeface="黑体" panose="02010609060101010101" pitchFamily="49" charset="-122"/>
+                <a:ea typeface="黑体" panose="02010609060101010101" pitchFamily="49" charset="-122"/>
+                <a:cs typeface="宋体" panose="02010600030101010101" pitchFamily="2" charset="-122"/>
+              </a:rPr>
+              <a:t>失败准则</a:t>
+            </a:r>
+            <a:endParaRPr lang="en-US" altLang="zh-CN" sz="2400" b="1" kern="100" dirty="0">
+              <a:latin typeface="黑体" panose="02010609060101010101" pitchFamily="49" charset="-122"/>
+              <a:ea typeface="黑体" panose="02010609060101010101" pitchFamily="49" charset="-122"/>
+              <a:cs typeface="Times New Roman" panose="02020603050405020304" pitchFamily="18" charset="0"/>
+            </a:endParaRPr>
+          </a:p>
+          <a:p>
+            <a:pPr marL="285750" indent="-285750" algn="just">
+              <a:lnSpc>
+                <a:spcPct val="150000"/>
+              </a:lnSpc>
+              <a:spcBef>
+                <a:spcPts val="1300"/>
+              </a:spcBef>
+              <a:spcAft>
+                <a:spcPts val="1300"/>
+              </a:spcAft>
+              <a:buFont typeface="Arial" panose="020B0604020202020204" pitchFamily="34" charset="0"/>
+              <a:buChar char="•"/>
+            </a:pPr>
+            <a:r>
+              <a:rPr lang="zh-CN" altLang="zh-CN" sz="1800" b="1" dirty="0">
                 <a:solidFill>
                   <a:srgbClr val="000000"/>
                 </a:solidFill>
-                <a:latin typeface="微软雅黑" panose="020B0503020204020204" charset="-122"/>
+                <a:effectLst/>
+                <a:highlight>
+                  <a:srgbClr val="FFFFFF"/>
+                </a:highlight>
+                <a:latin typeface="宋体" panose="02010600030101010101" pitchFamily="2" charset="-122"/>
+                <a:ea typeface="宋体" panose="02010600030101010101" pitchFamily="2" charset="-122"/>
+                <a:cs typeface="宋体" panose="02010600030101010101" pitchFamily="2" charset="-122"/>
               </a:rPr>
-              <a:t>图表4</a:t>
+              <a:t>功能测试</a:t>
             </a:r>
-            <a:endParaRPr sz="700" b="0">
+            <a:endParaRPr lang="en-US" altLang="zh-CN" sz="1800" b="1" dirty="0">
               <a:solidFill>
                 <a:srgbClr val="000000"/>
               </a:solidFill>
-              <a:latin typeface="微软雅黑" panose="020B0503020204020204" charset="-122"/>
+              <a:effectLst/>
+              <a:highlight>
+                <a:srgbClr val="FFFFFF"/>
+              </a:highlight>
+              <a:latin typeface="宋体" panose="02010600030101010101" pitchFamily="2" charset="-122"/>
+              <a:ea typeface="宋体" panose="02010600030101010101" pitchFamily="2" charset="-122"/>
+              <a:cs typeface="宋体" panose="02010600030101010101" pitchFamily="2" charset="-122"/>
             </a:endParaRPr>
           </a:p>
-        </p:txBody>
-      </p:sp>
-      <p:sp>
-        <p:nvSpPr>
-          <p:cNvPr id="10" name="TextBox 9"/>
+          <a:p>
+            <a:pPr algn="just">
+              <a:lnSpc>
+                <a:spcPct val="150000"/>
+              </a:lnSpc>
+              <a:spcBef>
+                <a:spcPts val="1300"/>
+              </a:spcBef>
+              <a:spcAft>
+                <a:spcPts val="1300"/>
+              </a:spcAft>
+            </a:pPr>
+            <a:r>
+              <a:rPr lang="zh-CN" altLang="zh-CN" sz="1800" b="1" dirty="0">
+                <a:solidFill>
+                  <a:srgbClr val="00B050"/>
+                </a:solidFill>
+                <a:effectLst/>
+                <a:highlight>
+                  <a:srgbClr val="FFFFFF"/>
+                </a:highlight>
+                <a:latin typeface="宋体" panose="02010600030101010101" pitchFamily="2" charset="-122"/>
+                <a:ea typeface="宋体" panose="02010600030101010101" pitchFamily="2" charset="-122"/>
+                <a:cs typeface="宋体" panose="02010600030101010101" pitchFamily="2" charset="-122"/>
+              </a:rPr>
+              <a:t>通过准则：</a:t>
+            </a:r>
+            <a:r>
+              <a:rPr lang="zh-CN" altLang="zh-CN" sz="1800" b="1" dirty="0">
+                <a:solidFill>
+                  <a:srgbClr val="000000"/>
+                </a:solidFill>
+                <a:effectLst/>
+                <a:highlight>
+                  <a:srgbClr val="FFFFFF"/>
+                </a:highlight>
+                <a:latin typeface="宋体" panose="02010600030101010101" pitchFamily="2" charset="-122"/>
+                <a:ea typeface="宋体" panose="02010600030101010101" pitchFamily="2" charset="-122"/>
+                <a:cs typeface="宋体" panose="02010600030101010101" pitchFamily="2" charset="-122"/>
+              </a:rPr>
+              <a:t>测试项通过测试用例，满足预期功能且未出现任何错误；</a:t>
+            </a:r>
+            <a:endParaRPr lang="en-US" altLang="zh-CN" sz="1800" b="1" dirty="0">
+              <a:solidFill>
+                <a:srgbClr val="000000"/>
+              </a:solidFill>
+              <a:effectLst/>
+              <a:highlight>
+                <a:srgbClr val="FFFFFF"/>
+              </a:highlight>
+              <a:latin typeface="宋体" panose="02010600030101010101" pitchFamily="2" charset="-122"/>
+              <a:ea typeface="宋体" panose="02010600030101010101" pitchFamily="2" charset="-122"/>
+              <a:cs typeface="宋体" panose="02010600030101010101" pitchFamily="2" charset="-122"/>
+            </a:endParaRPr>
+          </a:p>
+          <a:p>
+            <a:pPr marL="285750" indent="-285750" algn="just">
+              <a:lnSpc>
+                <a:spcPct val="150000"/>
+              </a:lnSpc>
+              <a:spcBef>
+                <a:spcPts val="1300"/>
+              </a:spcBef>
+              <a:spcAft>
+                <a:spcPts val="1300"/>
+              </a:spcAft>
+              <a:buFont typeface="Arial" panose="020B0604020202020204" pitchFamily="34" charset="0"/>
+              <a:buChar char="•"/>
+            </a:pPr>
+            <a:r>
+              <a:rPr lang="zh-CN" altLang="zh-CN" b="1" dirty="0">
+                <a:solidFill>
+                  <a:srgbClr val="000000"/>
+                </a:solidFill>
+                <a:highlight>
+                  <a:srgbClr val="FFFFFF"/>
+                </a:highlight>
+                <a:latin typeface="宋体" panose="02010600030101010101" pitchFamily="2" charset="-122"/>
+                <a:ea typeface="宋体" panose="02010600030101010101" pitchFamily="2" charset="-122"/>
+              </a:rPr>
+              <a:t>安全测试</a:t>
+            </a:r>
+            <a:endParaRPr lang="en-US" altLang="zh-CN" b="1" dirty="0">
+              <a:solidFill>
+                <a:srgbClr val="000000"/>
+              </a:solidFill>
+              <a:highlight>
+                <a:srgbClr val="FFFFFF"/>
+              </a:highlight>
+              <a:latin typeface="宋体" panose="02010600030101010101" pitchFamily="2" charset="-122"/>
+              <a:ea typeface="宋体" panose="02010600030101010101" pitchFamily="2" charset="-122"/>
+            </a:endParaRPr>
+          </a:p>
+          <a:p>
+            <a:pPr algn="just">
+              <a:lnSpc>
+                <a:spcPct val="150000"/>
+              </a:lnSpc>
+              <a:spcBef>
+                <a:spcPts val="1300"/>
+              </a:spcBef>
+              <a:spcAft>
+                <a:spcPts val="1300"/>
+              </a:spcAft>
+            </a:pPr>
+            <a:r>
+              <a:rPr lang="zh-CN" altLang="zh-CN" sz="1800" b="1" dirty="0">
+                <a:solidFill>
+                  <a:srgbClr val="00B050"/>
+                </a:solidFill>
+                <a:effectLst/>
+                <a:highlight>
+                  <a:srgbClr val="FFFFFF"/>
+                </a:highlight>
+                <a:latin typeface="宋体" panose="02010600030101010101" pitchFamily="2" charset="-122"/>
+                <a:ea typeface="宋体" panose="02010600030101010101" pitchFamily="2" charset="-122"/>
+                <a:cs typeface="宋体" panose="02010600030101010101" pitchFamily="2" charset="-122"/>
+              </a:rPr>
+              <a:t>通过准则：</a:t>
+            </a:r>
+            <a:r>
+              <a:rPr lang="zh-CN" altLang="zh-CN" sz="1800" b="1" dirty="0">
+                <a:solidFill>
+                  <a:srgbClr val="000000"/>
+                </a:solidFill>
+                <a:effectLst/>
+                <a:highlight>
+                  <a:srgbClr val="FFFFFF"/>
+                </a:highlight>
+                <a:latin typeface="宋体" panose="02010600030101010101" pitchFamily="2" charset="-122"/>
+                <a:ea typeface="宋体" panose="02010600030101010101" pitchFamily="2" charset="-122"/>
+                <a:cs typeface="宋体" panose="02010600030101010101" pitchFamily="2" charset="-122"/>
+              </a:rPr>
+              <a:t>测试项未发现任何安全风险或安全漏洞；</a:t>
+            </a:r>
+            <a:endParaRPr lang="en-US" altLang="zh-CN" b="1" dirty="0">
+              <a:highlight>
+                <a:srgbClr val="FFFFFF"/>
+              </a:highlight>
+              <a:latin typeface="宋体" panose="02010600030101010101" pitchFamily="2" charset="-122"/>
+              <a:ea typeface="宋体" panose="02010600030101010101" pitchFamily="2" charset="-122"/>
+              <a:cs typeface="宋体" panose="02010600030101010101" pitchFamily="2" charset="-122"/>
+            </a:endParaRPr>
+          </a:p>
+          <a:p>
+            <a:pPr algn="just">
+              <a:lnSpc>
+                <a:spcPct val="150000"/>
+              </a:lnSpc>
+              <a:spcBef>
+                <a:spcPts val="1300"/>
+              </a:spcBef>
+              <a:spcAft>
+                <a:spcPts val="1300"/>
+              </a:spcAft>
+            </a:pPr>
+            <a:r>
+              <a:rPr lang="zh-CN" altLang="zh-CN" sz="1800" b="1" dirty="0">
+                <a:solidFill>
+                  <a:srgbClr val="FF0000"/>
+                </a:solidFill>
+                <a:effectLst/>
+                <a:highlight>
+                  <a:srgbClr val="FFFFFF"/>
+                </a:highlight>
+                <a:latin typeface="宋体" panose="02010600030101010101" pitchFamily="2" charset="-122"/>
+                <a:ea typeface="宋体" panose="02010600030101010101" pitchFamily="2" charset="-122"/>
+                <a:cs typeface="宋体" panose="02010600030101010101" pitchFamily="2" charset="-122"/>
+              </a:rPr>
+              <a:t>失败准则：</a:t>
+            </a:r>
+            <a:r>
+              <a:rPr lang="zh-CN" altLang="en-US" sz="1800" b="1" dirty="0">
+                <a:solidFill>
+                  <a:srgbClr val="FF0000"/>
+                </a:solidFill>
+                <a:effectLst/>
+                <a:highlight>
+                  <a:srgbClr val="FFFFFF"/>
+                </a:highlight>
+                <a:latin typeface="宋体" panose="02010600030101010101" pitchFamily="2" charset="-122"/>
+                <a:ea typeface="宋体" panose="02010600030101010101" pitchFamily="2" charset="-122"/>
+                <a:cs typeface="宋体" panose="02010600030101010101" pitchFamily="2" charset="-122"/>
+              </a:rPr>
+              <a:t>反之</a:t>
+            </a:r>
+            <a:endParaRPr lang="zh-CN" altLang="zh-CN" sz="1800" b="1" dirty="0">
+              <a:effectLst/>
+              <a:highlight>
+                <a:srgbClr val="FFFFFF"/>
+              </a:highlight>
+              <a:latin typeface="宋体" panose="02010600030101010101" pitchFamily="2" charset="-122"/>
+              <a:ea typeface="宋体" panose="02010600030101010101" pitchFamily="2" charset="-122"/>
+              <a:cs typeface="宋体" panose="02010600030101010101" pitchFamily="2" charset="-122"/>
+            </a:endParaRPr>
+          </a:p>
+        </p:txBody>
+      </p:sp>
+      <p:sp>
+        <p:nvSpPr>
+          <p:cNvPr id="14" name="文本框 13"/>
           <p:cNvSpPr txBox="1"/>
-          <p:nvPr/>
-        </p:nvSpPr>
-        <p:spPr>
-          <a:xfrm>
-            <a:off x="822960" y="960120"/>
-            <a:ext cx="4846320" cy="4480560"/>
+          <p:nvPr>
+            <p:custDataLst>
+              <p:tags r:id="rId2"/>
+            </p:custDataLst>
+          </p:nvPr>
+        </p:nvSpPr>
+        <p:spPr>
+          <a:xfrm>
+            <a:off x="5038842" y="820873"/>
+            <a:ext cx="7952014" cy="5308313"/>
           </a:xfrm>
           <a:prstGeom prst="rect">
             <a:avLst/>
@@ -17921,241 +17043,410 @@
           <a:noFill/>
         </p:spPr>
         <p:txBody>
-          <a:bodyPr wrap="none">
-            <a:normAutofit/>
+          <a:bodyPr wrap="square">
+            <a:spAutoFit/>
           </a:bodyPr>
-          <a:lstStyle/>
-          <a:p>
+          <a:p>
+            <a:pPr algn="just">
+              <a:lnSpc>
+                <a:spcPct val="150000"/>
+              </a:lnSpc>
+              <a:spcBef>
+                <a:spcPts val="1300"/>
+              </a:spcBef>
+              <a:spcAft>
+                <a:spcPts val="1300"/>
+              </a:spcAft>
+            </a:pPr>
             <a:r>
-              <a:rPr sz="1700" b="1">
+              <a:rPr lang="zh-CN" altLang="zh-CN" sz="2400" b="1" kern="100" dirty="0">
+                <a:effectLst/>
+                <a:latin typeface="黑体" panose="02010609060101010101" pitchFamily="49" charset="-122"/>
+                <a:ea typeface="黑体" panose="02010609060101010101" pitchFamily="49" charset="-122"/>
+                <a:cs typeface="宋体" panose="02010600030101010101" pitchFamily="2" charset="-122"/>
+              </a:rPr>
+              <a:t>暂停准则和继续准则</a:t>
+            </a:r>
+            <a:endParaRPr lang="zh-CN" altLang="zh-CN" sz="2400" b="1" kern="100" dirty="0">
+              <a:effectLst/>
+              <a:latin typeface="黑体" panose="02010609060101010101" pitchFamily="49" charset="-122"/>
+              <a:ea typeface="黑体" panose="02010609060101010101" pitchFamily="49" charset="-122"/>
+              <a:cs typeface="Times New Roman" panose="02020603050405020304" pitchFamily="18" charset="0"/>
+            </a:endParaRPr>
+          </a:p>
+          <a:p>
+            <a:pPr marL="285750" indent="-285750">
+              <a:lnSpc>
+                <a:spcPct val="150000"/>
+              </a:lnSpc>
+              <a:spcAft>
+                <a:spcPts val="750"/>
+              </a:spcAft>
+              <a:buFont typeface="Arial" panose="020B0604020202020204" pitchFamily="34" charset="0"/>
+              <a:buChar char="•"/>
+            </a:pPr>
+            <a:r>
+              <a:rPr lang="zh-CN" altLang="zh-CN" sz="1800" b="1" dirty="0">
                 <a:solidFill>
                   <a:srgbClr val="000000"/>
                 </a:solidFill>
-                <a:latin typeface="微软雅黑" panose="020B0503020204020204" charset="-122"/>
+                <a:effectLst/>
+                <a:highlight>
+                  <a:srgbClr val="FFFFFF"/>
+                </a:highlight>
+                <a:latin typeface="宋体" panose="02010600030101010101" pitchFamily="2" charset="-122"/>
+                <a:ea typeface="宋体" panose="02010600030101010101" pitchFamily="2" charset="-122"/>
+                <a:cs typeface="宋体" panose="02010600030101010101" pitchFamily="2" charset="-122"/>
               </a:rPr>
-              <a:t>测试项通过/失败准则</a:t>
+              <a:t>暂停准则</a:t>
             </a:r>
-            <a:endParaRPr sz="1700" b="1">
-              <a:solidFill>
-                <a:srgbClr val="000000"/>
-              </a:solidFill>
-              <a:latin typeface="微软雅黑" panose="020B0503020204020204" charset="-122"/>
+            <a:endParaRPr lang="zh-CN" altLang="zh-CN" sz="1800" dirty="0">
+              <a:effectLst/>
+              <a:highlight>
+                <a:srgbClr val="FFFFFF"/>
+              </a:highlight>
+              <a:latin typeface="宋体" panose="02010600030101010101" pitchFamily="2" charset="-122"/>
+              <a:ea typeface="宋体" panose="02010600030101010101" pitchFamily="2" charset="-122"/>
+              <a:cs typeface="宋体" panose="02010600030101010101" pitchFamily="2" charset="-122"/>
             </a:endParaRPr>
           </a:p>
           <a:p>
+            <a:pPr marL="342900" lvl="0" indent="-342900">
+              <a:lnSpc>
+                <a:spcPct val="150000"/>
+              </a:lnSpc>
+              <a:spcAft>
+                <a:spcPts val="750"/>
+              </a:spcAft>
+              <a:buFont typeface="+mj-lt"/>
+              <a:buAutoNum type="arabicPeriod"/>
+              <a:tabLst>
+                <a:tab pos="198120" algn="l"/>
+              </a:tabLst>
+            </a:pPr>
             <a:r>
-              <a:rPr sz="1500" b="0">
+              <a:rPr lang="zh-CN" altLang="zh-CN" sz="1800" dirty="0">
                 <a:solidFill>
                   <a:srgbClr val="000000"/>
                 </a:solidFill>
-                <a:latin typeface="微软雅黑" panose="020B0503020204020204" charset="-122"/>
+                <a:effectLst/>
+                <a:highlight>
+                  <a:srgbClr val="FFFFFF"/>
+                </a:highlight>
+                <a:latin typeface="宋体" panose="02010600030101010101" pitchFamily="2" charset="-122"/>
+                <a:ea typeface="宋体" panose="02010600030101010101" pitchFamily="2" charset="-122"/>
+                <a:cs typeface="宋体" panose="02010600030101010101" pitchFamily="2" charset="-122"/>
               </a:rPr>
-              <a:t>• 全部自动化用例通过</a:t>
+              <a:t>软件或硬件故障：测试环境或设备</a:t>
             </a:r>
-            <a:endParaRPr sz="1500" b="0">
-              <a:solidFill>
-                <a:srgbClr val="000000"/>
-              </a:solidFill>
-              <a:latin typeface="微软雅黑" panose="020B0503020204020204" charset="-122"/>
+            <a:endParaRPr lang="zh-CN" altLang="zh-CN" sz="1800" dirty="0">
+              <a:effectLst/>
+              <a:highlight>
+                <a:srgbClr val="FFFFFF"/>
+              </a:highlight>
+              <a:latin typeface="宋体" panose="02010600030101010101" pitchFamily="2" charset="-122"/>
+              <a:ea typeface="宋体" panose="02010600030101010101" pitchFamily="2" charset="-122"/>
+              <a:cs typeface="宋体" panose="02010600030101010101" pitchFamily="2" charset="-122"/>
             </a:endParaRPr>
           </a:p>
           <a:p>
+            <a:pPr marL="342900" lvl="0" indent="-342900">
+              <a:lnSpc>
+                <a:spcPct val="150000"/>
+              </a:lnSpc>
+              <a:spcAft>
+                <a:spcPts val="750"/>
+              </a:spcAft>
+              <a:buFont typeface="+mj-lt"/>
+              <a:buAutoNum type="arabicPeriod"/>
+              <a:tabLst>
+                <a:tab pos="198120" algn="l"/>
+              </a:tabLst>
+            </a:pPr>
             <a:r>
-              <a:rPr sz="1500" b="0">
+              <a:rPr lang="zh-CN" altLang="zh-CN" sz="1800" dirty="0">
                 <a:solidFill>
                   <a:srgbClr val="000000"/>
                 </a:solidFill>
-                <a:latin typeface="微软雅黑" panose="020B0503020204020204" charset="-122"/>
+                <a:effectLst/>
+                <a:highlight>
+                  <a:srgbClr val="FFFFFF"/>
+                </a:highlight>
+                <a:latin typeface="宋体" panose="02010600030101010101" pitchFamily="2" charset="-122"/>
+                <a:ea typeface="宋体" panose="02010600030101010101" pitchFamily="2" charset="-122"/>
+                <a:cs typeface="宋体" panose="02010600030101010101" pitchFamily="2" charset="-122"/>
               </a:rPr>
-              <a:t>• JaCoCo 报告正常生成</a:t>
+              <a:t>严重缺陷或故障：项目代码</a:t>
             </a:r>
-            <a:endParaRPr sz="1500" b="0">
-              <a:solidFill>
-                <a:srgbClr val="000000"/>
-              </a:solidFill>
-              <a:latin typeface="微软雅黑" panose="020B0503020204020204" charset="-122"/>
+            <a:endParaRPr lang="zh-CN" altLang="zh-CN" sz="1800" dirty="0">
+              <a:effectLst/>
+              <a:highlight>
+                <a:srgbClr val="FFFFFF"/>
+              </a:highlight>
+              <a:latin typeface="宋体" panose="02010600030101010101" pitchFamily="2" charset="-122"/>
+              <a:ea typeface="宋体" panose="02010600030101010101" pitchFamily="2" charset="-122"/>
+              <a:cs typeface="宋体" panose="02010600030101010101" pitchFamily="2" charset="-122"/>
             </a:endParaRPr>
           </a:p>
           <a:p>
+            <a:pPr marL="342900" lvl="0" indent="-342900">
+              <a:lnSpc>
+                <a:spcPct val="150000"/>
+              </a:lnSpc>
+              <a:spcAft>
+                <a:spcPts val="750"/>
+              </a:spcAft>
+              <a:buFont typeface="+mj-lt"/>
+              <a:buAutoNum type="arabicPeriod"/>
+              <a:tabLst>
+                <a:tab pos="198120" algn="l"/>
+              </a:tabLst>
+            </a:pPr>
             <a:r>
-              <a:rPr sz="1500" b="0">
+              <a:rPr lang="zh-CN" altLang="zh-CN" sz="1800" dirty="0">
                 <a:solidFill>
                   <a:srgbClr val="000000"/>
                 </a:solidFill>
-                <a:latin typeface="微软雅黑" panose="020B0503020204020204" charset="-122"/>
+                <a:effectLst/>
+                <a:highlight>
+                  <a:srgbClr val="FFFFFF"/>
+                </a:highlight>
+                <a:latin typeface="宋体" panose="02010600030101010101" pitchFamily="2" charset="-122"/>
+                <a:ea typeface="宋体" panose="02010600030101010101" pitchFamily="2" charset="-122"/>
+                <a:cs typeface="宋体" panose="02010600030101010101" pitchFamily="2" charset="-122"/>
               </a:rPr>
-              <a:t>• 整体指令覆盖率 ≥ 85%，分支覆盖率 ≥ 75%</a:t>
+              <a:t>资源缺乏：人力、设备、时间不足</a:t>
             </a:r>
-            <a:endParaRPr sz="1500" b="0">
-              <a:solidFill>
-                <a:srgbClr val="000000"/>
-              </a:solidFill>
-              <a:latin typeface="微软雅黑" panose="020B0503020204020204" charset="-122"/>
+            <a:endParaRPr lang="zh-CN" altLang="zh-CN" sz="1800" dirty="0">
+              <a:effectLst/>
+              <a:highlight>
+                <a:srgbClr val="FFFFFF"/>
+              </a:highlight>
+              <a:latin typeface="宋体" panose="02010600030101010101" pitchFamily="2" charset="-122"/>
+              <a:ea typeface="宋体" panose="02010600030101010101" pitchFamily="2" charset="-122"/>
+              <a:cs typeface="宋体" panose="02010600030101010101" pitchFamily="2" charset="-122"/>
             </a:endParaRPr>
           </a:p>
           <a:p>
+            <a:pPr marL="342900" lvl="0" indent="-342900">
+              <a:lnSpc>
+                <a:spcPct val="150000"/>
+              </a:lnSpc>
+              <a:spcAft>
+                <a:spcPts val="750"/>
+              </a:spcAft>
+              <a:buFont typeface="+mj-lt"/>
+              <a:buAutoNum type="arabicPeriod"/>
+              <a:tabLst>
+                <a:tab pos="198120" algn="l"/>
+              </a:tabLst>
+            </a:pPr>
             <a:r>
-              <a:rPr sz="1500" b="0">
+              <a:rPr lang="zh-CN" altLang="zh-CN" sz="1800" dirty="0">
                 <a:solidFill>
                   <a:srgbClr val="000000"/>
                 </a:solidFill>
-                <a:latin typeface="微软雅黑" panose="020B0503020204020204" charset="-122"/>
+                <a:effectLst/>
+                <a:highlight>
+                  <a:srgbClr val="FFFFFF"/>
+                </a:highlight>
+                <a:latin typeface="宋体" panose="02010600030101010101" pitchFamily="2" charset="-122"/>
+                <a:ea typeface="宋体" panose="02010600030101010101" pitchFamily="2" charset="-122"/>
+                <a:cs typeface="宋体" panose="02010600030101010101" pitchFamily="2" charset="-122"/>
               </a:rPr>
-              <a:t>• 新克隆环境可重复执行</a:t>
+              <a:t>需求改变：需求改变，测试计划和测试用例需要重新评估调整</a:t>
             </a:r>
-            <a:endParaRPr sz="1500" b="0">
-              <a:solidFill>
-                <a:srgbClr val="000000"/>
-              </a:solidFill>
-              <a:latin typeface="微软雅黑" panose="020B0503020204020204" charset="-122"/>
+            <a:endParaRPr lang="zh-CN" altLang="zh-CN" sz="1800" dirty="0">
+              <a:effectLst/>
+              <a:highlight>
+                <a:srgbClr val="FFFFFF"/>
+              </a:highlight>
+              <a:latin typeface="宋体" panose="02010600030101010101" pitchFamily="2" charset="-122"/>
+              <a:ea typeface="宋体" panose="02010600030101010101" pitchFamily="2" charset="-122"/>
+              <a:cs typeface="宋体" panose="02010600030101010101" pitchFamily="2" charset="-122"/>
             </a:endParaRPr>
           </a:p>
-        </p:txBody>
-      </p:sp>
-      <p:sp>
-        <p:nvSpPr>
-          <p:cNvPr id="11" name="TextBox 10"/>
-          <p:cNvSpPr txBox="1"/>
-          <p:nvPr/>
-        </p:nvSpPr>
-        <p:spPr>
-          <a:xfrm>
-            <a:off x="6217920" y="960120"/>
-            <a:ext cx="4846320" cy="4480560"/>
-          </a:xfrm>
-          <a:prstGeom prst="rect">
-            <a:avLst/>
-          </a:prstGeom>
-          <a:noFill/>
-        </p:spPr>
-        <p:txBody>
-          <a:bodyPr wrap="none">
-            <a:normAutofit/>
-          </a:bodyPr>
-          <a:lstStyle/>
-          <a:p>
+          <a:p>
+            <a:pPr marL="285750" indent="-285750">
+              <a:lnSpc>
+                <a:spcPct val="150000"/>
+              </a:lnSpc>
+              <a:spcAft>
+                <a:spcPts val="750"/>
+              </a:spcAft>
+              <a:buFont typeface="Arial" panose="020B0604020202020204" pitchFamily="34" charset="0"/>
+              <a:buChar char="•"/>
+            </a:pPr>
             <a:r>
-              <a:rPr sz="1700" b="1">
+              <a:rPr lang="zh-CN" altLang="zh-CN" sz="1800" b="1" dirty="0">
                 <a:solidFill>
                   <a:srgbClr val="000000"/>
                 </a:solidFill>
-                <a:latin typeface="微软雅黑" panose="020B0503020204020204" charset="-122"/>
+                <a:effectLst/>
+                <a:highlight>
+                  <a:srgbClr val="FFFFFF"/>
+                </a:highlight>
+                <a:latin typeface="宋体" panose="02010600030101010101" pitchFamily="2" charset="-122"/>
+                <a:ea typeface="宋体" panose="02010600030101010101" pitchFamily="2" charset="-122"/>
+                <a:cs typeface="宋体" panose="02010600030101010101" pitchFamily="2" charset="-122"/>
               </a:rPr>
-              <a:t>暂停准则和继续准则</a:t>
+              <a:t>继续准则</a:t>
             </a:r>
-            <a:endParaRPr sz="1700" b="1">
-              <a:solidFill>
-                <a:srgbClr val="000000"/>
-              </a:solidFill>
-              <a:latin typeface="微软雅黑" panose="020B0503020204020204" charset="-122"/>
+            <a:endParaRPr lang="zh-CN" altLang="zh-CN" sz="1800" dirty="0">
+              <a:effectLst/>
+              <a:highlight>
+                <a:srgbClr val="FFFFFF"/>
+              </a:highlight>
+              <a:latin typeface="宋体" panose="02010600030101010101" pitchFamily="2" charset="-122"/>
+              <a:ea typeface="宋体" panose="02010600030101010101" pitchFamily="2" charset="-122"/>
+              <a:cs typeface="宋体" panose="02010600030101010101" pitchFamily="2" charset="-122"/>
             </a:endParaRPr>
           </a:p>
           <a:p>
+            <a:pPr marL="342900" lvl="0" indent="-342900">
+              <a:lnSpc>
+                <a:spcPct val="150000"/>
+              </a:lnSpc>
+              <a:spcAft>
+                <a:spcPts val="750"/>
+              </a:spcAft>
+              <a:buFont typeface="+mj-lt"/>
+              <a:buAutoNum type="arabicPeriod"/>
+              <a:tabLst>
+                <a:tab pos="198120" algn="l"/>
+              </a:tabLst>
+            </a:pPr>
             <a:r>
-              <a:rPr sz="1500" b="0">
+              <a:rPr lang="zh-CN" altLang="zh-CN" sz="1800" dirty="0">
                 <a:solidFill>
                   <a:srgbClr val="000000"/>
                 </a:solidFill>
-                <a:latin typeface="微软雅黑" panose="020B0503020204020204" charset="-122"/>
+                <a:effectLst/>
+                <a:highlight>
+                  <a:srgbClr val="FFFFFF"/>
+                </a:highlight>
+                <a:latin typeface="宋体" panose="02010600030101010101" pitchFamily="2" charset="-122"/>
+                <a:ea typeface="宋体" panose="02010600030101010101" pitchFamily="2" charset="-122"/>
+                <a:cs typeface="宋体" panose="02010600030101010101" pitchFamily="2" charset="-122"/>
               </a:rPr>
-              <a:t>• 测试基座或依赖失效时暂停</a:t>
+              <a:t>软件或硬件故障</a:t>
             </a:r>
-            <a:endParaRPr sz="1500" b="0">
-              <a:solidFill>
-                <a:srgbClr val="000000"/>
-              </a:solidFill>
-              <a:latin typeface="微软雅黑" panose="020B0503020204020204" charset="-122"/>
-            </a:endParaRPr>
-          </a:p>
-          <a:p>
             <a:r>
-              <a:rPr sz="1500" b="0">
+              <a:rPr lang="zh-CN" altLang="en-US" sz="1800" dirty="0">
                 <a:solidFill>
                   <a:srgbClr val="000000"/>
                 </a:solidFill>
-                <a:latin typeface="微软雅黑" panose="020B0503020204020204" charset="-122"/>
+                <a:effectLst/>
+                <a:highlight>
+                  <a:srgbClr val="FFFFFF"/>
+                </a:highlight>
+                <a:latin typeface="宋体" panose="02010600030101010101" pitchFamily="2" charset="-122"/>
+                <a:ea typeface="宋体" panose="02010600030101010101" pitchFamily="2" charset="-122"/>
+                <a:cs typeface="宋体" panose="02010600030101010101" pitchFamily="2" charset="-122"/>
               </a:rPr>
-              <a:t>• 核心模块无法编译时暂停</a:t>
+              <a:t>、</a:t>
             </a:r>
-            <a:endParaRPr sz="1500" b="0">
-              <a:solidFill>
-                <a:srgbClr val="000000"/>
-              </a:solidFill>
-              <a:latin typeface="微软雅黑" panose="020B0503020204020204" charset="-122"/>
-            </a:endParaRPr>
-          </a:p>
-          <a:p>
             <a:r>
-              <a:rPr sz="1500" b="0">
+              <a:rPr lang="zh-CN" altLang="zh-CN" sz="1800" dirty="0">
                 <a:solidFill>
                   <a:srgbClr val="000000"/>
                 </a:solidFill>
-                <a:latin typeface="微软雅黑" panose="020B0503020204020204" charset="-122"/>
+                <a:effectLst/>
+                <a:highlight>
+                  <a:srgbClr val="FFFFFF"/>
+                </a:highlight>
+                <a:latin typeface="宋体" panose="02010600030101010101" pitchFamily="2" charset="-122"/>
+                <a:ea typeface="宋体" panose="02010600030101010101" pitchFamily="2" charset="-122"/>
+                <a:cs typeface="宋体" panose="02010600030101010101" pitchFamily="2" charset="-122"/>
               </a:rPr>
-              <a:t>• 严重缺陷修复、环境恢复后继续</a:t>
+              <a:t>严重缺陷修复</a:t>
             </a:r>
-            <a:endParaRPr sz="1500" b="0">
-              <a:solidFill>
-                <a:srgbClr val="000000"/>
-              </a:solidFill>
-              <a:latin typeface="微软雅黑" panose="020B0503020204020204" charset="-122"/>
+            <a:endParaRPr lang="zh-CN" altLang="zh-CN" sz="1800" dirty="0">
+              <a:effectLst/>
+              <a:highlight>
+                <a:srgbClr val="FFFFFF"/>
+              </a:highlight>
+              <a:latin typeface="宋体" panose="02010600030101010101" pitchFamily="2" charset="-122"/>
+              <a:ea typeface="宋体" panose="02010600030101010101" pitchFamily="2" charset="-122"/>
+              <a:cs typeface="宋体" panose="02010600030101010101" pitchFamily="2" charset="-122"/>
             </a:endParaRPr>
           </a:p>
           <a:p>
+            <a:pPr marL="342900" lvl="0" indent="-342900">
+              <a:lnSpc>
+                <a:spcPct val="150000"/>
+              </a:lnSpc>
+              <a:spcAft>
+                <a:spcPts val="750"/>
+              </a:spcAft>
+              <a:buFont typeface="+mj-lt"/>
+              <a:buAutoNum type="arabicPeriod"/>
+              <a:tabLst>
+                <a:tab pos="198120" algn="l"/>
+              </a:tabLst>
+            </a:pPr>
             <a:r>
-              <a:rPr sz="1500" b="0">
+              <a:rPr lang="zh-CN" altLang="zh-CN" sz="1800" dirty="0">
                 <a:solidFill>
                   <a:srgbClr val="000000"/>
                 </a:solidFill>
-                <a:latin typeface="微软雅黑" panose="020B0503020204020204" charset="-122"/>
+                <a:effectLst/>
+                <a:highlight>
+                  <a:srgbClr val="FFFFFF"/>
+                </a:highlight>
+                <a:latin typeface="宋体" panose="02010600030101010101" pitchFamily="2" charset="-122"/>
+                <a:ea typeface="宋体" panose="02010600030101010101" pitchFamily="2" charset="-122"/>
+                <a:cs typeface="宋体" panose="02010600030101010101" pitchFamily="2" charset="-122"/>
               </a:rPr>
-              <a:t>• 需求或范围变化后同步更新用例与文档</a:t>
+              <a:t>资源问题解决</a:t>
             </a:r>
-            <a:endParaRPr sz="1500" b="0">
-              <a:solidFill>
-                <a:srgbClr val="000000"/>
-              </a:solidFill>
-              <a:latin typeface="微软雅黑" panose="020B0503020204020204" charset="-122"/>
+            <a:endParaRPr lang="zh-CN" altLang="zh-CN" sz="1800" dirty="0">
+              <a:effectLst/>
+              <a:highlight>
+                <a:srgbClr val="FFFFFF"/>
+              </a:highlight>
+              <a:latin typeface="宋体" panose="02010600030101010101" pitchFamily="2" charset="-122"/>
+              <a:ea typeface="宋体" panose="02010600030101010101" pitchFamily="2" charset="-122"/>
+              <a:cs typeface="宋体" panose="02010600030101010101" pitchFamily="2" charset="-122"/>
             </a:endParaRPr>
           </a:p>
-        </p:txBody>
-      </p:sp>
-      <p:sp>
-        <p:nvSpPr>
-          <p:cNvPr id="12" name="TextBox 11"/>
-          <p:cNvSpPr txBox="1"/>
-          <p:nvPr/>
-        </p:nvSpPr>
-        <p:spPr>
-          <a:xfrm>
-            <a:off x="868680" y="5486400"/>
-            <a:ext cx="9875520" cy="411480"/>
-          </a:xfrm>
-          <a:prstGeom prst="rect">
-            <a:avLst/>
-          </a:prstGeom>
-          <a:noFill/>
-        </p:spPr>
-        <p:txBody>
-          <a:bodyPr wrap="none">
-            <a:normAutofit/>
-          </a:bodyPr>
-          <a:lstStyle/>
-          <a:p>
+          <a:p>
+            <a:pPr marL="342900" lvl="0" indent="-342900">
+              <a:lnSpc>
+                <a:spcPct val="150000"/>
+              </a:lnSpc>
+              <a:spcAft>
+                <a:spcPts val="750"/>
+              </a:spcAft>
+              <a:buFont typeface="+mj-lt"/>
+              <a:buAutoNum type="arabicPeriod"/>
+              <a:tabLst>
+                <a:tab pos="198120" algn="l"/>
+              </a:tabLst>
+            </a:pPr>
             <a:r>
-              <a:rPr sz="1400" b="0">
+              <a:rPr lang="zh-CN" altLang="zh-CN" sz="1800" dirty="0">
                 <a:solidFill>
-                  <a:srgbClr val="AB4824"/>
+                  <a:srgbClr val="000000"/>
                 </a:solidFill>
-                <a:latin typeface="微软雅黑" panose="020B0503020204020204" charset="-122"/>
+                <a:effectLst/>
+                <a:highlight>
+                  <a:srgbClr val="FFFFFF"/>
+                </a:highlight>
+                <a:latin typeface="宋体" panose="02010600030101010101" pitchFamily="2" charset="-122"/>
+                <a:ea typeface="宋体" panose="02010600030101010101" pitchFamily="2" charset="-122"/>
+                <a:cs typeface="宋体" panose="02010600030101010101" pitchFamily="2" charset="-122"/>
               </a:rPr>
-              <a:t>通过：128 条测试全部通过；失败：出现阻断缺陷、报告缺失或环境不可复现。</a:t>
+              <a:t>重新评估项目需求</a:t>
             </a:r>
-            <a:endParaRPr sz="1400" b="0">
-              <a:solidFill>
-                <a:srgbClr val="AB4824"/>
-              </a:solidFill>
-              <a:latin typeface="微软雅黑" panose="020B0503020204020204" charset="-122"/>
+            <a:endParaRPr lang="zh-CN" altLang="zh-CN" sz="1800" dirty="0">
+              <a:effectLst/>
+              <a:highlight>
+                <a:srgbClr val="FFFFFF"/>
+              </a:highlight>
+              <a:latin typeface="宋体" panose="02010600030101010101" pitchFamily="2" charset="-122"/>
+              <a:ea typeface="宋体" panose="02010600030101010101" pitchFamily="2" charset="-122"/>
+              <a:cs typeface="宋体" panose="02010600030101010101" pitchFamily="2" charset="-122"/>
             </a:endParaRPr>
           </a:p>
         </p:txBody>
@@ -18476,46 +17767,6 @@
           <a:lstStyle/>
           <a:p>
             <a:pPr algn="ctr"/>
-          </a:p>
-        </p:txBody>
-      </p:sp>
-      <p:sp>
-        <p:nvSpPr>
-          <p:cNvPr id="9" name="TextBox 8"/>
-          <p:cNvSpPr txBox="1"/>
-          <p:nvPr/>
-        </p:nvSpPr>
-        <p:spPr>
-          <a:xfrm>
-            <a:off x="228600" y="6419088"/>
-            <a:ext cx="1280160" cy="164592"/>
-          </a:xfrm>
-          <a:prstGeom prst="rect">
-            <a:avLst/>
-          </a:prstGeom>
-          <a:noFill/>
-        </p:spPr>
-        <p:txBody>
-          <a:bodyPr wrap="none">
-            <a:spAutoFit/>
-          </a:bodyPr>
-          <a:lstStyle/>
-          <a:p>
-            <a:r>
-              <a:rPr sz="700" b="0">
-                <a:solidFill>
-                  <a:srgbClr val="000000"/>
-                </a:solidFill>
-                <a:latin typeface="微软雅黑" panose="020B0503020204020204" charset="-122"/>
-              </a:rPr>
-              <a:t>图表5</a:t>
-            </a:r>
-            <a:endParaRPr sz="700" b="0">
-              <a:solidFill>
-                <a:srgbClr val="000000"/>
-              </a:solidFill>
-              <a:latin typeface="微软雅黑" panose="020B0503020204020204" charset="-122"/>
-            </a:endParaRPr>
           </a:p>
         </p:txBody>
       </p:sp>
@@ -18588,22 +17839,11 @@
                     <a:bodyPr/>
                     <a:lstStyle/>
                     <a:p>
-                      <a:pPr algn="ctr"/>
-                      <a:r>
-                        <a:rPr sz="1300" b="1">
-                          <a:solidFill>
-                            <a:srgbClr val="FFFFFF"/>
-                          </a:solidFill>
-                          <a:latin typeface="微软雅黑" panose="020B0503020204020204" charset="-122"/>
-                        </a:rPr>
+                      <a:r>
+                        <a:rPr sz="1700"/>
                         <a:t>风险类型</a:t>
                       </a:r>
-                      <a:endParaRPr sz="1300" b="1">
-                        <a:solidFill>
-                          <a:srgbClr val="FFFFFF"/>
-                        </a:solidFill>
-                        <a:latin typeface="微软雅黑" panose="020B0503020204020204" charset="-122"/>
-                      </a:endParaRPr>
+                      <a:endParaRPr sz="1700"/>
                     </a:p>
                   </a:txBody>
                   <a:tcPr>
@@ -18617,22 +17857,11 @@
                     <a:bodyPr/>
                     <a:lstStyle/>
                     <a:p>
-                      <a:pPr algn="ctr"/>
-                      <a:r>
-                        <a:rPr sz="1300" b="1">
-                          <a:solidFill>
-                            <a:srgbClr val="FFFFFF"/>
-                          </a:solidFill>
-                          <a:latin typeface="微软雅黑" panose="020B0503020204020204" charset="-122"/>
-                        </a:rPr>
+                      <a:r>
+                        <a:rPr sz="1700"/>
                         <a:t>本项目表现</a:t>
                       </a:r>
-                      <a:endParaRPr sz="1300" b="1">
-                        <a:solidFill>
-                          <a:srgbClr val="FFFFFF"/>
-                        </a:solidFill>
-                        <a:latin typeface="微软雅黑" panose="020B0503020204020204" charset="-122"/>
-                      </a:endParaRPr>
+                      <a:endParaRPr sz="1700"/>
                     </a:p>
                   </a:txBody>
                   <a:tcPr>
@@ -18646,22 +17875,11 @@
                     <a:bodyPr/>
                     <a:lstStyle/>
                     <a:p>
-                      <a:pPr algn="ctr"/>
-                      <a:r>
-                        <a:rPr sz="1300" b="1">
-                          <a:solidFill>
-                            <a:srgbClr val="FFFFFF"/>
-                          </a:solidFill>
-                          <a:latin typeface="微软雅黑" panose="020B0503020204020204" charset="-122"/>
-                        </a:rPr>
+                      <a:r>
+                        <a:rPr sz="1700"/>
                         <a:t>应急措施</a:t>
                       </a:r>
-                      <a:endParaRPr sz="1300" b="1">
-                        <a:solidFill>
-                          <a:srgbClr val="FFFFFF"/>
-                        </a:solidFill>
-                        <a:latin typeface="微软雅黑" panose="020B0503020204020204" charset="-122"/>
-                      </a:endParaRPr>
+                      <a:endParaRPr sz="1700"/>
                     </a:p>
                   </a:txBody>
                   <a:tcPr>
@@ -18677,22 +17895,11 @@
                     <a:bodyPr/>
                     <a:lstStyle/>
                     <a:p>
-                      <a:pPr algn="ctr"/>
-                      <a:r>
-                        <a:rPr sz="1200" b="0">
-                          <a:solidFill>
-                            <a:srgbClr val="000000"/>
-                          </a:solidFill>
-                          <a:latin typeface="微软雅黑" panose="020B0503020204020204" charset="-122"/>
-                        </a:rPr>
+                      <a:r>
+                        <a:rPr sz="1700"/>
                         <a:t>数据库差异</a:t>
                       </a:r>
-                      <a:endParaRPr sz="1200" b="0">
-                        <a:solidFill>
-                          <a:srgbClr val="000000"/>
-                        </a:solidFill>
-                        <a:latin typeface="微软雅黑" panose="020B0503020204020204" charset="-122"/>
-                      </a:endParaRPr>
+                      <a:endParaRPr sz="1700"/>
                     </a:p>
                   </a:txBody>
                   <a:tcPr>
@@ -18706,22 +17913,11 @@
                     <a:bodyPr/>
                     <a:lstStyle/>
                     <a:p>
-                      <a:pPr algn="ctr"/>
-                      <a:r>
-                        <a:rPr sz="1200" b="0">
-                          <a:solidFill>
-                            <a:srgbClr val="000000"/>
-                          </a:solidFill>
-                          <a:latin typeface="微软雅黑" panose="020B0503020204020204" charset="-122"/>
-                        </a:rPr>
+                      <a:r>
+                        <a:rPr sz="1700"/>
                         <a:t>H2 与 MySQL 可能存在少量行为差异</a:t>
                       </a:r>
-                      <a:endParaRPr sz="1200" b="0">
-                        <a:solidFill>
-                          <a:srgbClr val="000000"/>
-                        </a:solidFill>
-                        <a:latin typeface="微软雅黑" panose="020B0503020204020204" charset="-122"/>
-                      </a:endParaRPr>
+                      <a:endParaRPr sz="1700"/>
                     </a:p>
                   </a:txBody>
                   <a:tcPr>
@@ -18735,22 +17931,11 @@
                     <a:bodyPr/>
                     <a:lstStyle/>
                     <a:p>
-                      <a:pPr algn="ctr"/>
-                      <a:r>
-                        <a:rPr sz="1200" b="0">
-                          <a:solidFill>
-                            <a:srgbClr val="000000"/>
-                          </a:solidFill>
-                          <a:latin typeface="微软雅黑" panose="020B0503020204020204" charset="-122"/>
-                        </a:rPr>
-                        <a:t>启用 MySQL 模式；差异写入测试总结</a:t>
-                      </a:r>
-                      <a:endParaRPr sz="1200" b="0">
-                        <a:solidFill>
-                          <a:srgbClr val="000000"/>
-                        </a:solidFill>
-                        <a:latin typeface="微软雅黑" panose="020B0503020204020204" charset="-122"/>
-                      </a:endParaRPr>
+                      <a:r>
+                        <a:rPr sz="1700"/>
+                        <a:t>启用 MySQL 模式；真实库再回归</a:t>
+                      </a:r>
+                      <a:endParaRPr sz="1700"/>
                     </a:p>
                   </a:txBody>
                   <a:tcPr>
@@ -18766,22 +17951,11 @@
                     <a:bodyPr/>
                     <a:lstStyle/>
                     <a:p>
-                      <a:pPr algn="ctr"/>
-                      <a:r>
-                        <a:rPr sz="1200" b="0">
-                          <a:solidFill>
-                            <a:srgbClr val="000000"/>
-                          </a:solidFill>
-                          <a:latin typeface="微软雅黑" panose="020B0503020204020204" charset="-122"/>
-                        </a:rPr>
-                        <a:t>覆盖盲区</a:t>
-                      </a:r>
-                      <a:endParaRPr sz="1200" b="0">
-                        <a:solidFill>
-                          <a:srgbClr val="000000"/>
-                        </a:solidFill>
-                        <a:latin typeface="微软雅黑" panose="020B0503020204020204" charset="-122"/>
-                      </a:endParaRPr>
+                      <a:r>
+                        <a:rPr sz="1700"/>
+                        <a:t>权限校验</a:t>
+                      </a:r>
+                      <a:endParaRPr sz="1700"/>
                     </a:p>
                   </a:txBody>
                   <a:tcPr>
@@ -18795,22 +17969,11 @@
                     <a:bodyPr/>
                     <a:lstStyle/>
                     <a:p>
-                      <a:pPr algn="ctr"/>
-                      <a:r>
-                        <a:rPr sz="1200" b="0">
-                          <a:solidFill>
-                            <a:srgbClr val="000000"/>
-                          </a:solidFill>
-                          <a:latin typeface="微软雅黑" panose="020B0503020204020204" charset="-122"/>
-                        </a:rPr>
-                        <a:t>FileUtil 真实落盘未完全覆盖</a:t>
-                      </a:r>
-                      <a:endParaRPr sz="1200" b="0">
-                        <a:solidFill>
-                          <a:srgbClr val="000000"/>
-                        </a:solidFill>
-                        <a:latin typeface="微软雅黑" panose="020B0503020204020204" charset="-122"/>
-                      </a:endParaRPr>
+                      <a:r>
+                        <a:rPr sz="1700"/>
+                        <a:t>后台页、删除订单未严格拦截</a:t>
+                      </a:r>
+                      <a:endParaRPr sz="1700"/>
                     </a:p>
                   </a:txBody>
                   <a:tcPr>
@@ -18824,22 +17987,11 @@
                     <a:bodyPr/>
                     <a:lstStyle/>
                     <a:p>
-                      <a:pPr algn="ctr"/>
-                      <a:r>
-                        <a:rPr sz="1200" b="0">
-                          <a:solidFill>
-                            <a:srgbClr val="000000"/>
-                          </a:solidFill>
-                          <a:latin typeface="微软雅黑" panose="020B0503020204020204" charset="-122"/>
-                        </a:rPr>
-                        <a:t>列为已知限制；后续隔离文件系统</a:t>
-                      </a:r>
-                      <a:endParaRPr sz="1200" b="0">
-                        <a:solidFill>
-                          <a:srgbClr val="000000"/>
-                        </a:solidFill>
-                        <a:latin typeface="微软雅黑" panose="020B0503020204020204" charset="-122"/>
-                      </a:endParaRPr>
+                      <a:r>
+                        <a:rPr sz="1700"/>
+                        <a:t>后续补登录/角色校验</a:t>
+                      </a:r>
+                      <a:endParaRPr sz="1700"/>
                     </a:p>
                   </a:txBody>
                   <a:tcPr>
@@ -18855,22 +18007,11 @@
                     <a:bodyPr/>
                     <a:lstStyle/>
                     <a:p>
-                      <a:pPr algn="ctr"/>
-                      <a:r>
-                        <a:rPr sz="1200" b="0">
-                          <a:solidFill>
-                            <a:srgbClr val="000000"/>
-                          </a:solidFill>
-                          <a:latin typeface="微软雅黑" panose="020B0503020204020204" charset="-122"/>
-                        </a:rPr>
-                        <a:t>脚本维护</a:t>
-                      </a:r>
-                      <a:endParaRPr sz="1200" b="0">
-                        <a:solidFill>
-                          <a:srgbClr val="000000"/>
-                        </a:solidFill>
-                        <a:latin typeface="微软雅黑" panose="020B0503020204020204" charset="-122"/>
-                      </a:endParaRPr>
+                      <a:r>
+                        <a:rPr sz="1700"/>
+                        <a:t>参数边界</a:t>
+                      </a:r>
+                      <a:endParaRPr sz="1700"/>
                     </a:p>
                   </a:txBody>
                   <a:tcPr>
@@ -18884,22 +18025,11 @@
                     <a:bodyPr/>
                     <a:lstStyle/>
                     <a:p>
-                      <a:pPr algn="ctr"/>
-                      <a:r>
-                        <a:rPr sz="1200" b="0">
-                          <a:solidFill>
-                            <a:srgbClr val="000000"/>
-                          </a:solidFill>
-                          <a:latin typeface="微软雅黑" panose="020B0503020204020204" charset="-122"/>
-                        </a:rPr>
-                        <a:t>文档和脚本可能不同步</a:t>
-                      </a:r>
-                      <a:endParaRPr sz="1200" b="0">
-                        <a:solidFill>
-                          <a:srgbClr val="000000"/>
-                        </a:solidFill>
-                        <a:latin typeface="微软雅黑" panose="020B0503020204020204" charset="-122"/>
-                      </a:endParaRPr>
+                      <a:r>
+                        <a:rPr sz="1700"/>
+                        <a:t>page=0、负数时长处理不足</a:t>
+                      </a:r>
+                      <a:endParaRPr sz="1700"/>
                     </a:p>
                   </a:txBody>
                   <a:tcPr>
@@ -18913,22 +18043,11 @@
                     <a:bodyPr/>
                     <a:lstStyle/>
                     <a:p>
-                      <a:pPr algn="ctr"/>
-                      <a:r>
-                        <a:rPr sz="1200" b="0">
-                          <a:solidFill>
-                            <a:srgbClr val="000000"/>
-                          </a:solidFill>
-                          <a:latin typeface="微软雅黑" panose="020B0503020204020204" charset="-122"/>
-                        </a:rPr>
-                        <a:t>统一编号；提交前执行 mvn test</a:t>
-                      </a:r>
-                      <a:endParaRPr sz="1200" b="0">
-                        <a:solidFill>
-                          <a:srgbClr val="000000"/>
-                        </a:solidFill>
-                        <a:latin typeface="微软雅黑" panose="020B0503020204020204" charset="-122"/>
-                      </a:endParaRPr>
+                      <a:r>
+                        <a:rPr sz="1700"/>
+                        <a:t>增加边界校验并回归</a:t>
+                      </a:r>
+                      <a:endParaRPr sz="1700"/>
                     </a:p>
                   </a:txBody>
                   <a:tcPr>
@@ -18944,22 +18063,11 @@
                     <a:bodyPr/>
                     <a:lstStyle/>
                     <a:p>
-                      <a:pPr algn="ctr"/>
-                      <a:r>
-                        <a:rPr sz="1200" b="0">
-                          <a:solidFill>
-                            <a:srgbClr val="000000"/>
-                          </a:solidFill>
-                          <a:latin typeface="微软雅黑" panose="020B0503020204020204" charset="-122"/>
-                        </a:rPr>
-                        <a:t>UI 风险</a:t>
-                      </a:r>
-                      <a:endParaRPr sz="1200" b="0">
-                        <a:solidFill>
-                          <a:srgbClr val="000000"/>
-                        </a:solidFill>
-                        <a:latin typeface="微软雅黑" panose="020B0503020204020204" charset="-122"/>
-                      </a:endParaRPr>
+                      <a:r>
+                        <a:rPr sz="1700"/>
+                        <a:t>密码安全</a:t>
+                      </a:r>
+                      <a:endParaRPr sz="1700"/>
                     </a:p>
                   </a:txBody>
                   <a:tcPr>
@@ -18973,22 +18081,11 @@
                     <a:bodyPr/>
                     <a:lstStyle/>
                     <a:p>
-                      <a:pPr algn="ctr"/>
-                      <a:r>
-                        <a:rPr sz="1200" b="0">
-                          <a:solidFill>
-                            <a:srgbClr val="000000"/>
-                          </a:solidFill>
-                          <a:latin typeface="微软雅黑" panose="020B0503020204020204" charset="-122"/>
-                        </a:rPr>
-                        <a:t>未做浏览器级 UI 自动化</a:t>
-                      </a:r>
-                      <a:endParaRPr sz="1200" b="0">
-                        <a:solidFill>
-                          <a:srgbClr val="000000"/>
-                        </a:solidFill>
-                        <a:latin typeface="微软雅黑" panose="020B0503020204020204" charset="-122"/>
-                      </a:endParaRPr>
+                      <a:r>
+                        <a:rPr sz="1700"/>
+                        <a:t>注册密码明文保存</a:t>
+                      </a:r>
+                      <a:endParaRPr sz="1700"/>
                     </a:p>
                   </a:txBody>
                   <a:tcPr>
@@ -19002,22 +18099,11 @@
                     <a:bodyPr/>
                     <a:lstStyle/>
                     <a:p>
-                      <a:pPr algn="ctr"/>
-                      <a:r>
-                        <a:rPr sz="1200" b="0">
-                          <a:solidFill>
-                            <a:srgbClr val="000000"/>
-                          </a:solidFill>
-                          <a:latin typeface="微软雅黑" panose="020B0503020204020204" charset="-122"/>
-                        </a:rPr>
-                        <a:t>明确范围外；后续补 E2E 回归</a:t>
-                      </a:r>
-                      <a:endParaRPr sz="1200" b="0">
-                        <a:solidFill>
-                          <a:srgbClr val="000000"/>
-                        </a:solidFill>
-                        <a:latin typeface="微软雅黑" panose="020B0503020204020204" charset="-122"/>
-                      </a:endParaRPr>
+                      <a:r>
+                        <a:rPr sz="1700"/>
+                        <a:t>后续加密存储并增加密码策略</a:t>
+                      </a:r>
+                      <a:endParaRPr sz="1700"/>
                     </a:p>
                   </a:txBody>
                   <a:tcPr>
@@ -19347,46 +18433,6 @@
           <a:lstStyle/>
           <a:p>
             <a:pPr algn="ctr"/>
-          </a:p>
-        </p:txBody>
-      </p:sp>
-      <p:sp>
-        <p:nvSpPr>
-          <p:cNvPr id="9" name="TextBox 8"/>
-          <p:cNvSpPr txBox="1"/>
-          <p:nvPr/>
-        </p:nvSpPr>
-        <p:spPr>
-          <a:xfrm>
-            <a:off x="228600" y="6419088"/>
-            <a:ext cx="1280160" cy="164592"/>
-          </a:xfrm>
-          <a:prstGeom prst="rect">
-            <a:avLst/>
-          </a:prstGeom>
-          <a:noFill/>
-        </p:spPr>
-        <p:txBody>
-          <a:bodyPr wrap="none">
-            <a:spAutoFit/>
-          </a:bodyPr>
-          <a:lstStyle/>
-          <a:p>
-            <a:r>
-              <a:rPr sz="700" b="0">
-                <a:solidFill>
-                  <a:srgbClr val="000000"/>
-                </a:solidFill>
-                <a:latin typeface="微软雅黑" panose="020B0503020204020204" charset="-122"/>
-              </a:rPr>
-              <a:t>图表6</a:t>
-            </a:r>
-            <a:endParaRPr sz="700" b="0">
-              <a:solidFill>
-                <a:srgbClr val="000000"/>
-              </a:solidFill>
-              <a:latin typeface="微软雅黑" panose="020B0503020204020204" charset="-122"/>
-            </a:endParaRPr>
           </a:p>
         </p:txBody>
       </p:sp>
@@ -19655,13 +18701,58 @@
                     <a:p>
                       <a:pPr algn="ctr"/>
                       <a:r>
+                        <a:rPr lang="zh-CN" sz="1100" b="0">
+                          <a:solidFill>
+                            <a:srgbClr val="000000"/>
+                          </a:solidFill>
+                          <a:latin typeface="微软雅黑" panose="020B0503020204020204" charset="-122"/>
+                        </a:rPr>
+                        <a:t>任务分配；</a:t>
+                      </a:r>
+                      <a:r>
                         <a:rPr sz="1100" b="0">
                           <a:solidFill>
                             <a:srgbClr val="000000"/>
                           </a:solidFill>
                           <a:latin typeface="微软雅黑" panose="020B0503020204020204" charset="-122"/>
                         </a:rPr>
-                        <a:t>环境搭建；service 单测；controller 集成测试；覆盖率报告</a:t>
+                        <a:t>环境搭建；</a:t>
+                      </a:r>
+                      <a:r>
+                        <a:rPr lang="zh-CN" sz="1100" b="0">
+                          <a:solidFill>
+                            <a:srgbClr val="000000"/>
+                          </a:solidFill>
+                          <a:latin typeface="微软雅黑" panose="020B0503020204020204" charset="-122"/>
+                        </a:rPr>
+                        <a:t>部分</a:t>
+                      </a:r>
+                      <a:r>
+                        <a:rPr sz="1100" b="0">
+                          <a:solidFill>
+                            <a:srgbClr val="000000"/>
+                          </a:solidFill>
+                          <a:latin typeface="微软雅黑" panose="020B0503020204020204" charset="-122"/>
+                        </a:rPr>
+                        <a:t>service 单测；</a:t>
+                      </a:r>
+                      <a:r>
+                        <a:rPr lang="zh-CN" sz="1100" b="0">
+                          <a:solidFill>
+                            <a:srgbClr val="000000"/>
+                          </a:solidFill>
+                          <a:latin typeface="微软雅黑" panose="020B0503020204020204" charset="-122"/>
+                        </a:rPr>
+                        <a:t>部分</a:t>
+                      </a:r>
+                      <a:r>
+                        <a:rPr sz="1100" b="0">
+                          <a:solidFill>
+                            <a:srgbClr val="000000"/>
+                          </a:solidFill>
+                          <a:latin typeface="微软雅黑" panose="020B0503020204020204" charset="-122"/>
+                        </a:rPr>
+                        <a:t>controller 集成测试；</a:t>
                       </a:r>
                       <a:endParaRPr sz="1100" b="0">
                         <a:solidFill>
@@ -19690,7 +18781,7 @@
                           </a:solidFill>
                           <a:latin typeface="微软雅黑" panose="020B0503020204020204" charset="-122"/>
                         </a:rPr>
-                        <a:t>25</a:t>
+                        <a:t>20</a:t>
                       </a:r>
                       <a:r>
                         <a:rPr sz="1100" b="0">
@@ -19788,7 +18879,27 @@
                           </a:solidFill>
                           <a:latin typeface="微软雅黑" panose="020B0503020204020204" charset="-122"/>
                         </a:rPr>
-                        <a:t>项目测试计划书；统一团队口径；交付清单</a:t>
+                        <a:t>项目测试计划书；</a:t>
+                      </a:r>
+                      <a:r>
+                        <a:rPr lang="zh-CN" sz="1100">
+                          <a:solidFill>
+                            <a:srgbClr val="000000"/>
+                          </a:solidFill>
+                          <a:latin typeface="微软雅黑" panose="020B0503020204020204" charset="-122"/>
+                          <a:sym typeface="+mn-ea"/>
+                        </a:rPr>
+                        <a:t>部分</a:t>
+                      </a:r>
+                      <a:r>
+                        <a:rPr sz="1100">
+                          <a:solidFill>
+                            <a:srgbClr val="000000"/>
+                          </a:solidFill>
+                          <a:latin typeface="微软雅黑" panose="020B0503020204020204" charset="-122"/>
+                          <a:sym typeface="+mn-ea"/>
+                        </a:rPr>
+                        <a:t>service 单测；</a:t>
                       </a:r>
                       <a:endParaRPr sz="1100" b="0">
                         <a:solidFill>
@@ -19915,7 +19026,27 @@
                           </a:solidFill>
                           <a:latin typeface="微软雅黑" panose="020B0503020204020204" charset="-122"/>
                         </a:rPr>
-                        <a:t>单元测试用例文档；维护 UT 编号</a:t>
+                        <a:t>单元测试用例文档；</a:t>
+                      </a:r>
+                      <a:r>
+                        <a:rPr lang="zh-CN" sz="1100">
+                          <a:solidFill>
+                            <a:srgbClr val="000000"/>
+                          </a:solidFill>
+                          <a:latin typeface="微软雅黑" panose="020B0503020204020204" charset="-122"/>
+                          <a:sym typeface="+mn-ea"/>
+                        </a:rPr>
+                        <a:t>部分</a:t>
+                      </a:r>
+                      <a:r>
+                        <a:rPr sz="1100">
+                          <a:solidFill>
+                            <a:srgbClr val="000000"/>
+                          </a:solidFill>
+                          <a:latin typeface="微软雅黑" panose="020B0503020204020204" charset="-122"/>
+                          <a:sym typeface="+mn-ea"/>
+                        </a:rPr>
+                        <a:t>controller 集成测试；</a:t>
                       </a:r>
                       <a:endParaRPr sz="1100" b="0">
                         <a:solidFill>
@@ -20044,7 +19175,45 @@
                         </a:rPr>
                         <a:t>集成测试用例文档；维护 controller 编号</a:t>
                       </a:r>
+                      <a:r>
+                        <a:rPr lang="zh-CN" sz="1100" b="0">
+                          <a:solidFill>
+                            <a:srgbClr val="000000"/>
+                          </a:solidFill>
+                          <a:latin typeface="微软雅黑" panose="020B0503020204020204" charset="-122"/>
+                        </a:rPr>
+                        <a:t>；</a:t>
+                      </a:r>
+                      <a:r>
+                        <a:rPr lang="zh-CN" sz="1100">
+                          <a:solidFill>
+                            <a:srgbClr val="000000"/>
+                          </a:solidFill>
+                          <a:latin typeface="微软雅黑" panose="020B0503020204020204" charset="-122"/>
+                          <a:sym typeface="+mn-ea"/>
+                        </a:rPr>
+                        <a:t>部分</a:t>
+                      </a:r>
+                      <a:r>
+                        <a:rPr sz="1100">
+                          <a:solidFill>
+                            <a:srgbClr val="000000"/>
+                          </a:solidFill>
+                          <a:latin typeface="微软雅黑" panose="020B0503020204020204" charset="-122"/>
+                          <a:sym typeface="+mn-ea"/>
+                        </a:rPr>
+                        <a:t>service 单测；</a:t>
+                      </a:r>
                       <a:endParaRPr sz="1100" b="0">
+                        <a:solidFill>
+                          <a:srgbClr val="000000"/>
+                        </a:solidFill>
+                        <a:latin typeface="微软雅黑" panose="020B0503020204020204" charset="-122"/>
+                      </a:endParaRPr>
+                    </a:p>
+                    <a:p>
+                      <a:pPr algn="ctr"/>
+                      <a:endParaRPr lang="zh-CN" sz="1100" b="0">
                         <a:solidFill>
                           <a:srgbClr val="000000"/>
                         </a:solidFill>
@@ -20169,7 +19338,27 @@
                           </a:solidFill>
                           <a:latin typeface="微软雅黑" panose="020B0503020204020204" charset="-122"/>
                         </a:rPr>
-                        <a:t>测试总结；结果汇总；改进建议</a:t>
+                        <a:t>测试总结；结果汇总；</a:t>
+                      </a:r>
+                      <a:r>
+                        <a:rPr lang="zh-CN" sz="1100">
+                          <a:solidFill>
+                            <a:srgbClr val="000000"/>
+                          </a:solidFill>
+                          <a:latin typeface="微软雅黑" panose="020B0503020204020204" charset="-122"/>
+                          <a:sym typeface="+mn-ea"/>
+                        </a:rPr>
+                        <a:t>部分</a:t>
+                      </a:r>
+                      <a:r>
+                        <a:rPr sz="1100">
+                          <a:solidFill>
+                            <a:srgbClr val="000000"/>
+                          </a:solidFill>
+                          <a:latin typeface="微软雅黑" panose="020B0503020204020204" charset="-122"/>
+                          <a:sym typeface="+mn-ea"/>
+                        </a:rPr>
+                        <a:t>controller 集成测试；</a:t>
                       </a:r>
                       <a:endParaRPr sz="1100" b="0">
                         <a:solidFill>
@@ -20198,7 +19387,7 @@
                           </a:solidFill>
                           <a:latin typeface="微软雅黑" panose="020B0503020204020204" charset="-122"/>
                         </a:rPr>
-                        <a:t>15</a:t>
+                        <a:t>20</a:t>
                       </a:r>
                       <a:r>
                         <a:rPr sz="1100" b="0">
@@ -20544,46 +19733,6 @@
           <a:lstStyle/>
           <a:p>
             <a:pPr algn="ctr"/>
-          </a:p>
-        </p:txBody>
-      </p:sp>
-      <p:sp>
-        <p:nvSpPr>
-          <p:cNvPr id="9" name="TextBox 8"/>
-          <p:cNvSpPr txBox="1"/>
-          <p:nvPr/>
-        </p:nvSpPr>
-        <p:spPr>
-          <a:xfrm>
-            <a:off x="228600" y="6419088"/>
-            <a:ext cx="1280160" cy="164592"/>
-          </a:xfrm>
-          <a:prstGeom prst="rect">
-            <a:avLst/>
-          </a:prstGeom>
-          <a:noFill/>
-        </p:spPr>
-        <p:txBody>
-          <a:bodyPr wrap="none">
-            <a:spAutoFit/>
-          </a:bodyPr>
-          <a:lstStyle/>
-          <a:p>
-            <a:r>
-              <a:rPr sz="700" b="0">
-                <a:solidFill>
-                  <a:srgbClr val="000000"/>
-                </a:solidFill>
-                <a:latin typeface="微软雅黑" panose="020B0503020204020204" charset="-122"/>
-              </a:rPr>
-              <a:t>图表7</a:t>
-            </a:r>
-            <a:endParaRPr sz="700" b="0">
-              <a:solidFill>
-                <a:srgbClr val="000000"/>
-              </a:solidFill>
-              <a:latin typeface="微软雅黑" panose="020B0503020204020204" charset="-122"/>
-            </a:endParaRPr>
           </a:p>
         </p:txBody>
       </p:sp>
@@ -21509,46 +20658,6 @@
       </p:sp>
       <p:sp>
         <p:nvSpPr>
-          <p:cNvPr id="9" name="TextBox 8"/>
-          <p:cNvSpPr txBox="1"/>
-          <p:nvPr/>
-        </p:nvSpPr>
-        <p:spPr>
-          <a:xfrm>
-            <a:off x="228600" y="6419088"/>
-            <a:ext cx="1280160" cy="164592"/>
-          </a:xfrm>
-          <a:prstGeom prst="rect">
-            <a:avLst/>
-          </a:prstGeom>
-          <a:noFill/>
-        </p:spPr>
-        <p:txBody>
-          <a:bodyPr wrap="none">
-            <a:spAutoFit/>
-          </a:bodyPr>
-          <a:lstStyle/>
-          <a:p>
-            <a:r>
-              <a:rPr sz="700" b="0">
-                <a:solidFill>
-                  <a:srgbClr val="000000"/>
-                </a:solidFill>
-                <a:latin typeface="微软雅黑" panose="020B0503020204020204" charset="-122"/>
-              </a:rPr>
-              <a:t>图表8</a:t>
-            </a:r>
-            <a:endParaRPr sz="700" b="0">
-              <a:solidFill>
-                <a:srgbClr val="000000"/>
-              </a:solidFill>
-              <a:latin typeface="微软雅黑" panose="020B0503020204020204" charset="-122"/>
-            </a:endParaRPr>
-          </a:p>
-        </p:txBody>
-      </p:sp>
-      <p:sp>
-        <p:nvSpPr>
           <p:cNvPr id="10" name="TextBox 9"/>
           <p:cNvSpPr txBox="1"/>
           <p:nvPr/>
@@ -21595,8 +20704,8 @@
         </p:nvSpPr>
         <p:spPr>
           <a:xfrm>
-            <a:off x="640080" y="1234440"/>
-            <a:ext cx="10789920" cy="4297680"/>
+            <a:off x="663575" y="1280160"/>
+            <a:ext cx="10789920" cy="1486535"/>
           </a:xfrm>
           <a:prstGeom prst="rect">
             <a:avLst/>
@@ -21633,7 +20742,16 @@
                 </a:solidFill>
                 <a:latin typeface="微软雅黑" panose="020B0503020204020204" charset="-122"/>
               </a:rPr>
-              <a:t>• 技术：JUnit5、SpringBootTest、Mockito、MockMvc、H2、JaCoCo</a:t>
+              <a:t>• </a:t>
+            </a:r>
+            <a:r>
+              <a:rPr sz="1500" b="1">
+                <a:solidFill>
+                  <a:srgbClr val="000000"/>
+                </a:solidFill>
+                <a:latin typeface="微软雅黑" panose="020B0503020204020204" charset="-122"/>
+              </a:rPr>
+              <a:t>技术：JUnit5、SpringBootTest、Mockito、MockMvc、H2、JaCoCo</a:t>
             </a:r>
             <a:endParaRPr sz="1500" b="0">
               <a:solidFill>
@@ -21691,6 +20809,99 @@
                 <a:srgbClr val="000000"/>
               </a:solidFill>
               <a:latin typeface="微软雅黑" panose="020B0503020204020204" charset="-122"/>
+            </a:endParaRPr>
+          </a:p>
+        </p:txBody>
+      </p:sp>
+      <p:sp>
+        <p:nvSpPr>
+          <p:cNvPr id="12" name="文本框 11"/>
+          <p:cNvSpPr txBox="1"/>
+          <p:nvPr/>
+        </p:nvSpPr>
+        <p:spPr>
+          <a:xfrm>
+            <a:off x="707390" y="3429000"/>
+            <a:ext cx="9896475" cy="783590"/>
+          </a:xfrm>
+          <a:prstGeom prst="rect">
+            <a:avLst/>
+          </a:prstGeom>
+          <a:noFill/>
+        </p:spPr>
+        <p:txBody>
+          <a:bodyPr wrap="square" rtlCol="0" anchor="t">
+            <a:spAutoFit/>
+          </a:bodyPr>
+          <a:p>
+            <a:pPr algn="l">
+              <a:buClrTx/>
+              <a:buSzTx/>
+              <a:buNone/>
+            </a:pPr>
+            <a:r>
+              <a:rPr sz="1500">
+                <a:solidFill>
+                  <a:srgbClr val="000000"/>
+                </a:solidFill>
+                <a:latin typeface="微软雅黑" panose="020B0503020204020204" charset="-122"/>
+                <a:sym typeface="+mn-ea"/>
+              </a:rPr>
+              <a:t>工具：IntelliJ IDEA等开发工具</a:t>
+            </a:r>
+            <a:endParaRPr sz="1500">
+              <a:solidFill>
+                <a:srgbClr val="000000"/>
+              </a:solidFill>
+              <a:latin typeface="微软雅黑" panose="020B0503020204020204" charset="-122"/>
+              <a:sym typeface="+mn-ea"/>
+            </a:endParaRPr>
+          </a:p>
+          <a:p>
+            <a:pPr algn="l">
+              <a:buClrTx/>
+              <a:buSzTx/>
+              <a:buNone/>
+            </a:pPr>
+            <a:r>
+              <a:rPr sz="1500">
+                <a:solidFill>
+                  <a:srgbClr val="000000"/>
+                </a:solidFill>
+                <a:latin typeface="微软雅黑" panose="020B0503020204020204" charset="-122"/>
+                <a:sym typeface="+mn-ea"/>
+              </a:rPr>
+              <a:t>期望的要达到的测试广度：每个Controller层的方法至少有一个测试用例</a:t>
+            </a:r>
+            <a:endParaRPr sz="1500">
+              <a:solidFill>
+                <a:srgbClr val="000000"/>
+              </a:solidFill>
+              <a:latin typeface="微软雅黑" panose="020B0503020204020204" charset="-122"/>
+            </a:endParaRPr>
+          </a:p>
+          <a:p>
+            <a:pPr algn="l">
+              <a:buClrTx/>
+              <a:buSzTx/>
+              <a:buNone/>
+            </a:pPr>
+            <a:r>
+              <a:rPr sz="1500">
+                <a:solidFill>
+                  <a:srgbClr val="000000"/>
+                </a:solidFill>
+                <a:latin typeface="微软雅黑" panose="020B0503020204020204" charset="-122"/>
+                <a:sym typeface="+mn-ea"/>
+              </a:rPr>
+              <a:t>完成准则：测试覆盖率达到100%</a:t>
+            </a:r>
+            <a:endParaRPr sz="1500">
+              <a:solidFill>
+                <a:srgbClr val="000000"/>
+              </a:solidFill>
+              <a:latin typeface="微软雅黑" panose="020B0503020204020204" charset="-122"/>
+              <a:sym typeface="+mn-ea"/>
             </a:endParaRPr>
           </a:p>
         </p:txBody>
@@ -22016,46 +21227,6 @@
       </p:sp>
       <p:sp>
         <p:nvSpPr>
-          <p:cNvPr id="9" name="TextBox 8"/>
-          <p:cNvSpPr txBox="1"/>
-          <p:nvPr/>
-        </p:nvSpPr>
-        <p:spPr>
-          <a:xfrm>
-            <a:off x="228600" y="6419088"/>
-            <a:ext cx="1280160" cy="164592"/>
-          </a:xfrm>
-          <a:prstGeom prst="rect">
-            <a:avLst/>
-          </a:prstGeom>
-          <a:noFill/>
-        </p:spPr>
-        <p:txBody>
-          <a:bodyPr wrap="none">
-            <a:spAutoFit/>
-          </a:bodyPr>
-          <a:lstStyle/>
-          <a:p>
-            <a:r>
-              <a:rPr sz="700" b="0">
-                <a:solidFill>
-                  <a:srgbClr val="000000"/>
-                </a:solidFill>
-                <a:latin typeface="微软雅黑" panose="020B0503020204020204" charset="-122"/>
-              </a:rPr>
-              <a:t>图表9</a:t>
-            </a:r>
-            <a:endParaRPr sz="700" b="0">
-              <a:solidFill>
-                <a:srgbClr val="000000"/>
-              </a:solidFill>
-              <a:latin typeface="微软雅黑" panose="020B0503020204020204" charset="-122"/>
-            </a:endParaRPr>
-          </a:p>
-        </p:txBody>
-      </p:sp>
-      <p:sp>
-        <p:nvSpPr>
           <p:cNvPr id="10" name="TextBox 9"/>
           <p:cNvSpPr txBox="1"/>
           <p:nvPr/>
@@ -22063,7 +21234,7 @@
         <p:spPr>
           <a:xfrm>
             <a:off x="749808" y="320040"/>
-            <a:ext cx="10515600" cy="640080"/>
+            <a:ext cx="2480310" cy="553085"/>
           </a:xfrm>
           <a:prstGeom prst="rect">
             <a:avLst/>
@@ -22083,7 +21254,7 @@
                 </a:solidFill>
                 <a:latin typeface="微软雅黑" panose="020B0503020204020204" charset="-122"/>
               </a:rPr>
-              <a:t>测试覆盖 service 与 controller 两层核心模块</a:t>
+              <a:t>测试覆盖模块</a:t>
             </a:r>
             <a:endParaRPr sz="3000" b="1">
               <a:solidFill>
@@ -23183,6 +22354,36 @@
 </file>
 
 <file path=ppt/tags/tag1.xml><?xml version="1.0" encoding="utf-8"?>
+<p:tagLst xmlns:p="http://schemas.openxmlformats.org/presentationml/2006/main">
+  <p:tag name="KSO_WM_BEAUTIFY_FLAG" val=""/>
+</p:tagLst>
+</file>
+
+<file path=ppt/tags/tag2.xml><?xml version="1.0" encoding="utf-8"?>
+<p:tagLst xmlns:p="http://schemas.openxmlformats.org/presentationml/2006/main">
+  <p:tag name="KSO_WM_BEAUTIFY_FLAG" val=""/>
+</p:tagLst>
+</file>
+
+<file path=ppt/tags/tag3.xml><?xml version="1.0" encoding="utf-8"?>
+<p:tagLst xmlns:p="http://schemas.openxmlformats.org/presentationml/2006/main">
+  <p:tag name="KSO_WM_BEAUTIFY_FLAG" val=""/>
+</p:tagLst>
+</file>
+
+<file path=ppt/tags/tag4.xml><?xml version="1.0" encoding="utf-8"?>
+<p:tagLst xmlns:p="http://schemas.openxmlformats.org/presentationml/2006/main">
+  <p:tag name="KSO_WM_BEAUTIFY_FLAG" val=""/>
+</p:tagLst>
+</file>
+
+<file path=ppt/tags/tag5.xml><?xml version="1.0" encoding="utf-8"?>
+<p:tagLst xmlns:p="http://schemas.openxmlformats.org/presentationml/2006/main">
+  <p:tag name="KSO_WM_BEAUTIFY_FLAG" val=""/>
+</p:tagLst>
+</file>
+
+<file path=ppt/tags/tag6.xml><?xml version="1.0" encoding="utf-8"?>
 <p:tagLst xmlns:p="http://schemas.openxmlformats.org/presentationml/2006/main">
   <p:tag name="commondata" val="eyJoZGlkIjoiODE3NzM4YjVmNGQ5YWQ1MWY4MzgxZGM1ZWEyZWIzN2IifQ=="/>
 </p:tagLst>
